--- a/public/lessons/year-6-maths/summer/week-26/use-angles-on-a-line-and-around-a-point/teaching-powerpoint-v1.pptx
+++ b/public/lessons/year-6-maths/summer/week-26/use-angles-on-a-line-and-around-a-point/teaching-powerpoint-v1.pptx
@@ -2,24 +2,24 @@
 <file path=ppt/presentation.xml><?xml version="1.0" encoding="utf-8"?>
 <p:presentation xmlns:p="http://schemas.openxmlformats.org/presentationml/2006/main">
   <p:sldMasterIdLst>
-    <p:sldMasterId xmlns:r="http://schemas.openxmlformats.org/officeDocument/2006/relationships" id="2147483648" r:id="Rc510913481204f10"/>
+    <p:sldMasterId xmlns:r="http://schemas.openxmlformats.org/officeDocument/2006/relationships" id="2147483648" r:id="R43fa18f96e2c42f6"/>
   </p:sldMasterIdLst>
   <p:notesMasterIdLst>
-    <p:notesMasterId xmlns:r="http://schemas.openxmlformats.org/officeDocument/2006/relationships" r:id="Rd046b9b11bf44d03"/>
+    <p:notesMasterId xmlns:r="http://schemas.openxmlformats.org/officeDocument/2006/relationships" r:id="R0f53fd9680af431e"/>
   </p:notesMasterIdLst>
   <p:sldIdLst>
-    <p:sldId xmlns:r="http://schemas.openxmlformats.org/officeDocument/2006/relationships" id="256" r:id="Rac21849201834011"/>
-    <p:sldId xmlns:r="http://schemas.openxmlformats.org/officeDocument/2006/relationships" id="257" r:id="Rf5e4064630724ccf"/>
-    <p:sldId xmlns:r="http://schemas.openxmlformats.org/officeDocument/2006/relationships" id="258" r:id="R5976d4b1e75e47b7"/>
-    <p:sldId xmlns:r="http://schemas.openxmlformats.org/officeDocument/2006/relationships" id="259" r:id="R2d20df3bd50e491c"/>
-    <p:sldId xmlns:r="http://schemas.openxmlformats.org/officeDocument/2006/relationships" id="260" r:id="Rf7f4cbddf46244c8"/>
-    <p:sldId xmlns:r="http://schemas.openxmlformats.org/officeDocument/2006/relationships" id="261" r:id="Re193b41892644471"/>
-    <p:sldId xmlns:r="http://schemas.openxmlformats.org/officeDocument/2006/relationships" id="262" r:id="Rc36251b321494eff"/>
-    <p:sldId xmlns:r="http://schemas.openxmlformats.org/officeDocument/2006/relationships" id="263" r:id="Rbc6fe28cfda84e59"/>
-    <p:sldId xmlns:r="http://schemas.openxmlformats.org/officeDocument/2006/relationships" id="264" r:id="Rd95ed72930b3485d"/>
-    <p:sldId xmlns:r="http://schemas.openxmlformats.org/officeDocument/2006/relationships" id="265" r:id="R112529ccff424bb0"/>
-    <p:sldId xmlns:r="http://schemas.openxmlformats.org/officeDocument/2006/relationships" id="266" r:id="R7c1d87ed6dd742d1"/>
-    <p:sldId xmlns:r="http://schemas.openxmlformats.org/officeDocument/2006/relationships" id="267" r:id="R0cfb8b9f9f7c43f9"/>
+    <p:sldId xmlns:r="http://schemas.openxmlformats.org/officeDocument/2006/relationships" id="256" r:id="R9a9416aac1114903"/>
+    <p:sldId xmlns:r="http://schemas.openxmlformats.org/officeDocument/2006/relationships" id="257" r:id="R0a65f15ec1ab49e0"/>
+    <p:sldId xmlns:r="http://schemas.openxmlformats.org/officeDocument/2006/relationships" id="258" r:id="Rc82ff0790d9241e1"/>
+    <p:sldId xmlns:r="http://schemas.openxmlformats.org/officeDocument/2006/relationships" id="259" r:id="R65db5886639b48e6"/>
+    <p:sldId xmlns:r="http://schemas.openxmlformats.org/officeDocument/2006/relationships" id="260" r:id="R900796515ce54537"/>
+    <p:sldId xmlns:r="http://schemas.openxmlformats.org/officeDocument/2006/relationships" id="261" r:id="R48c94fa78cf6492d"/>
+    <p:sldId xmlns:r="http://schemas.openxmlformats.org/officeDocument/2006/relationships" id="262" r:id="R2e70f881119b4feb"/>
+    <p:sldId xmlns:r="http://schemas.openxmlformats.org/officeDocument/2006/relationships" id="263" r:id="R23f275d52bcb4aba"/>
+    <p:sldId xmlns:r="http://schemas.openxmlformats.org/officeDocument/2006/relationships" id="264" r:id="R125e112dcbf346dc"/>
+    <p:sldId xmlns:r="http://schemas.openxmlformats.org/officeDocument/2006/relationships" id="265" r:id="Reabd35df3a0e4079"/>
+    <p:sldId xmlns:r="http://schemas.openxmlformats.org/officeDocument/2006/relationships" id="266" r:id="R559f65a2ffab4248"/>
+    <p:sldId xmlns:r="http://schemas.openxmlformats.org/officeDocument/2006/relationships" id="267" r:id="Ra3a4a2ec55a54fda"/>
   </p:sldIdLst>
   <p:sldSz cx="12192000" cy="6858000"/>
   <p:notesSz cx="6858000" cy="9144000"/>
@@ -873,7 +873,7 @@
           <a:lstStyle xmlns:a="http://schemas.openxmlformats.org/drawingml/2006/main"/>
           <a:p xmlns:a="http://schemas.openxmlformats.org/drawingml/2006/main">
             <a:r>
-              <a:t>I do. Reveal the question, setup and each calculation stage one click at a time. Pupils watch before copying. Model answer: 135 degrees.</a:t>
+              <a:t>I do. Reveal the question, then reveal each mathematical change one click at a time. Point to the numbers and operation that changed before moving to the next line. Final answer: 135 degrees.</a:t>
             </a:r>
           </a:p>
         </p:txBody>
@@ -1291,7 +1291,7 @@
   </p:cSld>
   <p:clrMap bg1="lt1" tx1="dk1" bg2="lt2" tx2="dk2" accent1="accent1" accent2="accent2" accent3="accent3" accent4="accent4" accent5="accent5" accent6="accent6" hlink="hlink" folHlink="folHlink"/>
   <p:sldLayoutIdLst>
-    <p:sldLayoutId xmlns:r="http://schemas.openxmlformats.org/officeDocument/2006/relationships" id="2147483649" r:id="R9021d6414ba84b3c"/>
+    <p:sldLayoutId xmlns:r="http://schemas.openxmlformats.org/officeDocument/2006/relationships" id="2147483649" r:id="R09dd199cd0434173"/>
   </p:sldLayoutIdLst>
   <p:txStyles>
     <p:titleStyle>
@@ -1842,7 +1842,7 @@
           <p:cNvPr id="12" name="">
             <a:extLst xmlns:a="http://schemas.openxmlformats.org/drawingml/2006/main">
               <a:ext uri="{FF2B5EF4-FFF2-40B4-BE49-F238E27FC236}">
-                <a16:creationId xmlns:a16="http://schemas.microsoft.com/office/drawing/2014/main" id="{815DFFD2-BCCD-4E00-A67C-37301C511A23}"/>
+                <a16:creationId xmlns:a16="http://schemas.microsoft.com/office/drawing/2014/main" id="{A6A90916-07CF-4760-9F33-C7E7C7C8EAD0}"/>
               </a:ext>
             </a:extLst>
           </p:cNvPr>
@@ -1874,7 +1874,7 @@
           <p:cNvPr id="2" name="">
             <a:extLst xmlns:a="http://schemas.openxmlformats.org/drawingml/2006/main">
               <a:ext uri="{FF2B5EF4-FFF2-40B4-BE49-F238E27FC236}">
-                <a16:creationId xmlns:a16="http://schemas.microsoft.com/office/drawing/2014/main" id="{3A1E8C2A-166D-43D3-A126-3002AC4B32A0}"/>
+                <a16:creationId xmlns:a16="http://schemas.microsoft.com/office/drawing/2014/main" id="{6470251C-C32C-4691-8CDC-3B432E97E7F1}"/>
               </a:ext>
             </a:extLst>
           </p:cNvPr>
@@ -1931,7 +1931,7 @@
           <p:cNvPr id="3" name="">
             <a:extLst xmlns:a="http://schemas.openxmlformats.org/drawingml/2006/main">
               <a:ext uri="{FF2B5EF4-FFF2-40B4-BE49-F238E27FC236}">
-                <a16:creationId xmlns:a16="http://schemas.microsoft.com/office/drawing/2014/main" id="{5E6305E5-1FDF-4C15-9997-3E07C27CD908}"/>
+                <a16:creationId xmlns:a16="http://schemas.microsoft.com/office/drawing/2014/main" id="{9D9211F5-FA49-4ACF-BF70-24E7B1C01E37}"/>
               </a:ext>
             </a:extLst>
           </p:cNvPr>
@@ -1965,7 +1965,7 @@
           <p:cNvPr id="4" name="">
             <a:extLst xmlns:a="http://schemas.openxmlformats.org/drawingml/2006/main">
               <a:ext uri="{FF2B5EF4-FFF2-40B4-BE49-F238E27FC236}">
-                <a16:creationId xmlns:a16="http://schemas.microsoft.com/office/drawing/2014/main" id="{42E19269-2146-4DA0-8713-C4579C48E545}"/>
+                <a16:creationId xmlns:a16="http://schemas.microsoft.com/office/drawing/2014/main" id="{8DF34DAD-4E2F-4C0D-8FBF-BEB76E3D8018}"/>
               </a:ext>
             </a:extLst>
           </p:cNvPr>
@@ -2022,7 +2022,7 @@
           <p:cNvPr id="5" name="">
             <a:extLst xmlns:a="http://schemas.openxmlformats.org/drawingml/2006/main">
               <a:ext uri="{FF2B5EF4-FFF2-40B4-BE49-F238E27FC236}">
-                <a16:creationId xmlns:a16="http://schemas.microsoft.com/office/drawing/2014/main" id="{70A3F205-C2CA-4E6C-A348-BCC7929E7C54}"/>
+                <a16:creationId xmlns:a16="http://schemas.microsoft.com/office/drawing/2014/main" id="{7C81B5F5-42EC-48DF-A6F1-A9AA1DDB5AFE}"/>
               </a:ext>
             </a:extLst>
           </p:cNvPr>
@@ -2079,7 +2079,7 @@
           <p:cNvPr id="6" name="">
             <a:extLst xmlns:a="http://schemas.openxmlformats.org/drawingml/2006/main">
               <a:ext uri="{FF2B5EF4-FFF2-40B4-BE49-F238E27FC236}">
-                <a16:creationId xmlns:a16="http://schemas.microsoft.com/office/drawing/2014/main" id="{232B5E2C-126F-40DF-8EB3-BCF89A2012C1}"/>
+                <a16:creationId xmlns:a16="http://schemas.microsoft.com/office/drawing/2014/main" id="{5D712D9A-E110-4DD3-A87A-E81A1A4ED0C0}"/>
               </a:ext>
             </a:extLst>
           </p:cNvPr>
@@ -2113,7 +2113,7 @@
           <p:cNvPr id="7" name="">
             <a:extLst xmlns:a="http://schemas.openxmlformats.org/drawingml/2006/main">
               <a:ext uri="{FF2B5EF4-FFF2-40B4-BE49-F238E27FC236}">
-                <a16:creationId xmlns:a16="http://schemas.microsoft.com/office/drawing/2014/main" id="{6C8B8CFF-7A95-4590-94E1-B33D2670B975}"/>
+                <a16:creationId xmlns:a16="http://schemas.microsoft.com/office/drawing/2014/main" id="{9D778E37-2983-444A-AAF3-F4FFE78E77A9}"/>
               </a:ext>
             </a:extLst>
           </p:cNvPr>
@@ -2170,7 +2170,7 @@
           <p:cNvPr id="8" name="">
             <a:extLst xmlns:a="http://schemas.openxmlformats.org/drawingml/2006/main">
               <a:ext uri="{FF2B5EF4-FFF2-40B4-BE49-F238E27FC236}">
-                <a16:creationId xmlns:a16="http://schemas.microsoft.com/office/drawing/2014/main" id="{BA481D73-CF4A-4D56-AC19-433CC33509D1}"/>
+                <a16:creationId xmlns:a16="http://schemas.microsoft.com/office/drawing/2014/main" id="{79EF009B-A3A7-4D14-8D79-A91E9536BA11}"/>
               </a:ext>
             </a:extLst>
           </p:cNvPr>
@@ -2227,7 +2227,7 @@
           <p:cNvPr id="9" name="">
             <a:extLst xmlns:a="http://schemas.openxmlformats.org/drawingml/2006/main">
               <a:ext uri="{FF2B5EF4-FFF2-40B4-BE49-F238E27FC236}">
-                <a16:creationId xmlns:a16="http://schemas.microsoft.com/office/drawing/2014/main" id="{94BFDE94-7534-49E0-B22C-E8AA1B130403}"/>
+                <a16:creationId xmlns:a16="http://schemas.microsoft.com/office/drawing/2014/main" id="{1CA5FFF9-682B-4AA7-9E0A-32A3D18719F0}"/>
               </a:ext>
             </a:extLst>
           </p:cNvPr>
@@ -2284,7 +2284,7 @@
           <p:cNvPr id="10" name="">
             <a:extLst xmlns:a="http://schemas.openxmlformats.org/drawingml/2006/main">
               <a:ext uri="{FF2B5EF4-FFF2-40B4-BE49-F238E27FC236}">
-                <a16:creationId xmlns:a16="http://schemas.microsoft.com/office/drawing/2014/main" id="{A3721AEC-B3EC-425E-B7CF-70A565FA2DBC}"/>
+                <a16:creationId xmlns:a16="http://schemas.microsoft.com/office/drawing/2014/main" id="{5AB445B6-5ACE-489F-8396-9F324E98F7F6}"/>
               </a:ext>
             </a:extLst>
           </p:cNvPr>
@@ -2341,7 +2341,7 @@
           <p:cNvPr id="11" name="">
             <a:extLst xmlns:a="http://schemas.openxmlformats.org/drawingml/2006/main">
               <a:ext uri="{FF2B5EF4-FFF2-40B4-BE49-F238E27FC236}">
-                <a16:creationId xmlns:a16="http://schemas.microsoft.com/office/drawing/2014/main" id="{BE4002C1-6718-4E8B-88DF-BC103088C7B6}"/>
+                <a16:creationId xmlns:a16="http://schemas.microsoft.com/office/drawing/2014/main" id="{0C5B6BA1-05C0-48AE-A17D-01B6DA216939}"/>
               </a:ext>
             </a:extLst>
           </p:cNvPr>
@@ -2396,7 +2396,7 @@
     </p:spTree>
     <p:extLst>
       <p:ext uri="{BB962C8B-B14F-4D97-AF65-F5344CB8AC3E}">
-        <p14:creationId xmlns:p14="http://schemas.microsoft.com/office/powerpoint/2010/main" val="226333517"/>
+        <p14:creationId xmlns:p14="http://schemas.microsoft.com/office/powerpoint/2010/main" val="537124659"/>
       </p:ext>
     </p:extLst>
   </p:cSld>
@@ -2427,7 +2427,7 @@
           <p:cNvPr id="14" name="">
             <a:extLst xmlns:a="http://schemas.openxmlformats.org/drawingml/2006/main">
               <a:ext uri="{FF2B5EF4-FFF2-40B4-BE49-F238E27FC236}">
-                <a16:creationId xmlns:a16="http://schemas.microsoft.com/office/drawing/2014/main" id="{66779BD6-4C7E-48E7-A0E7-256457C1162F}"/>
+                <a16:creationId xmlns:a16="http://schemas.microsoft.com/office/drawing/2014/main" id="{A9F4436D-A8E3-4CAA-BF2C-45CD5CB8C4FC}"/>
               </a:ext>
             </a:extLst>
           </p:cNvPr>
@@ -2459,7 +2459,7 @@
           <p:cNvPr id="2" name="">
             <a:extLst xmlns:a="http://schemas.openxmlformats.org/drawingml/2006/main">
               <a:ext uri="{FF2B5EF4-FFF2-40B4-BE49-F238E27FC236}">
-                <a16:creationId xmlns:a16="http://schemas.microsoft.com/office/drawing/2014/main" id="{CE63D93C-1C2A-4373-847D-5B21C57053F2}"/>
+                <a16:creationId xmlns:a16="http://schemas.microsoft.com/office/drawing/2014/main" id="{D5650432-E556-4AB8-92AC-62CE19E74980}"/>
               </a:ext>
             </a:extLst>
           </p:cNvPr>
@@ -2516,7 +2516,7 @@
           <p:cNvPr id="3" name="">
             <a:extLst xmlns:a="http://schemas.openxmlformats.org/drawingml/2006/main">
               <a:ext uri="{FF2B5EF4-FFF2-40B4-BE49-F238E27FC236}">
-                <a16:creationId xmlns:a16="http://schemas.microsoft.com/office/drawing/2014/main" id="{115312CB-2D9C-4506-9CD8-5F7A2CDDCECF}"/>
+                <a16:creationId xmlns:a16="http://schemas.microsoft.com/office/drawing/2014/main" id="{E008A36E-4200-4F87-9B84-12F2C6E0CC09}"/>
               </a:ext>
             </a:extLst>
           </p:cNvPr>
@@ -2548,7 +2548,7 @@
           <p:cNvPr id="4" name="">
             <a:extLst xmlns:a="http://schemas.openxmlformats.org/drawingml/2006/main">
               <a:ext uri="{FF2B5EF4-FFF2-40B4-BE49-F238E27FC236}">
-                <a16:creationId xmlns:a16="http://schemas.microsoft.com/office/drawing/2014/main" id="{C2BDEACA-B11C-47DC-9D60-2AF4D130757B}"/>
+                <a16:creationId xmlns:a16="http://schemas.microsoft.com/office/drawing/2014/main" id="{E51C1972-1789-436F-9E11-E5D2C09ADF53}"/>
               </a:ext>
             </a:extLst>
           </p:cNvPr>
@@ -2605,7 +2605,7 @@
           <p:cNvPr id="5" name="">
             <a:extLst xmlns:a="http://schemas.openxmlformats.org/drawingml/2006/main">
               <a:ext uri="{FF2B5EF4-FFF2-40B4-BE49-F238E27FC236}">
-                <a16:creationId xmlns:a16="http://schemas.microsoft.com/office/drawing/2014/main" id="{096D6766-E67D-4279-B66F-CE5137716F7D}"/>
+                <a16:creationId xmlns:a16="http://schemas.microsoft.com/office/drawing/2014/main" id="{CF26BD96-ABC3-4B39-8F11-B58F672256F8}"/>
               </a:ext>
             </a:extLst>
           </p:cNvPr>
@@ -2662,7 +2662,7 @@
           <p:cNvPr id="6" name="">
             <a:extLst xmlns:a="http://schemas.openxmlformats.org/drawingml/2006/main">
               <a:ext uri="{FF2B5EF4-FFF2-40B4-BE49-F238E27FC236}">
-                <a16:creationId xmlns:a16="http://schemas.microsoft.com/office/drawing/2014/main" id="{405C3103-D56D-40CF-9395-F8F620873911}"/>
+                <a16:creationId xmlns:a16="http://schemas.microsoft.com/office/drawing/2014/main" id="{F1150324-1332-4F2C-8279-15345F29A990}"/>
               </a:ext>
             </a:extLst>
           </p:cNvPr>
@@ -2719,7 +2719,7 @@
           <p:cNvPr id="7" name="">
             <a:extLst xmlns:a="http://schemas.openxmlformats.org/drawingml/2006/main">
               <a:ext uri="{FF2B5EF4-FFF2-40B4-BE49-F238E27FC236}">
-                <a16:creationId xmlns:a16="http://schemas.microsoft.com/office/drawing/2014/main" id="{85115355-3E94-4C68-9AC8-1BF84F126311}"/>
+                <a16:creationId xmlns:a16="http://schemas.microsoft.com/office/drawing/2014/main" id="{C8C13992-CB80-49EB-A9B4-BDE2E0D75646}"/>
               </a:ext>
             </a:extLst>
           </p:cNvPr>
@@ -2751,7 +2751,7 @@
           <p:cNvPr id="8" name="">
             <a:extLst xmlns:a="http://schemas.openxmlformats.org/drawingml/2006/main">
               <a:ext uri="{FF2B5EF4-FFF2-40B4-BE49-F238E27FC236}">
-                <a16:creationId xmlns:a16="http://schemas.microsoft.com/office/drawing/2014/main" id="{A5348BA5-B249-4AD0-B8FA-57A836BD0D90}"/>
+                <a16:creationId xmlns:a16="http://schemas.microsoft.com/office/drawing/2014/main" id="{0D95C0DB-B85E-4922-858C-77C9E6F6AD38}"/>
               </a:ext>
             </a:extLst>
           </p:cNvPr>
@@ -2808,7 +2808,7 @@
           <p:cNvPr id="9" name="">
             <a:extLst xmlns:a="http://schemas.openxmlformats.org/drawingml/2006/main">
               <a:ext uri="{FF2B5EF4-FFF2-40B4-BE49-F238E27FC236}">
-                <a16:creationId xmlns:a16="http://schemas.microsoft.com/office/drawing/2014/main" id="{33AB9BE1-CB8D-48E1-8391-E3C92CC4EE1A}"/>
+                <a16:creationId xmlns:a16="http://schemas.microsoft.com/office/drawing/2014/main" id="{DD4EC07A-1D43-4B47-9FDB-92AD04C13CAF}"/>
               </a:ext>
             </a:extLst>
           </p:cNvPr>
@@ -2865,7 +2865,7 @@
           <p:cNvPr id="10" name="">
             <a:extLst xmlns:a="http://schemas.openxmlformats.org/drawingml/2006/main">
               <a:ext uri="{FF2B5EF4-FFF2-40B4-BE49-F238E27FC236}">
-                <a16:creationId xmlns:a16="http://schemas.microsoft.com/office/drawing/2014/main" id="{05B9FDAA-BA0B-4723-A70F-6131AD326FBA}"/>
+                <a16:creationId xmlns:a16="http://schemas.microsoft.com/office/drawing/2014/main" id="{7FFB3421-CB65-4081-94BC-3C1EA2FCFB0D}"/>
               </a:ext>
             </a:extLst>
           </p:cNvPr>
@@ -2922,7 +2922,7 @@
           <p:cNvPr id="11" name="">
             <a:extLst xmlns:a="http://schemas.openxmlformats.org/drawingml/2006/main">
               <a:ext uri="{FF2B5EF4-FFF2-40B4-BE49-F238E27FC236}">
-                <a16:creationId xmlns:a16="http://schemas.microsoft.com/office/drawing/2014/main" id="{CBB3DA45-9689-4060-921C-527A1A1C3E01}"/>
+                <a16:creationId xmlns:a16="http://schemas.microsoft.com/office/drawing/2014/main" id="{F4D869CD-E327-407E-BD23-54621D030597}"/>
               </a:ext>
             </a:extLst>
           </p:cNvPr>
@@ -2979,7 +2979,7 @@
           <p:cNvPr id="12" name="">
             <a:extLst xmlns:a="http://schemas.openxmlformats.org/drawingml/2006/main">
               <a:ext uri="{FF2B5EF4-FFF2-40B4-BE49-F238E27FC236}">
-                <a16:creationId xmlns:a16="http://schemas.microsoft.com/office/drawing/2014/main" id="{6BBC2C90-B532-4C13-894E-7B1E63A6BB42}"/>
+                <a16:creationId xmlns:a16="http://schemas.microsoft.com/office/drawing/2014/main" id="{D4F2700B-9D79-4244-9478-EF726109CFB8}"/>
               </a:ext>
             </a:extLst>
           </p:cNvPr>
@@ -3036,7 +3036,7 @@
           <p:cNvPr id="13" name="">
             <a:extLst xmlns:a="http://schemas.openxmlformats.org/drawingml/2006/main">
               <a:ext uri="{FF2B5EF4-FFF2-40B4-BE49-F238E27FC236}">
-                <a16:creationId xmlns:a16="http://schemas.microsoft.com/office/drawing/2014/main" id="{8D912F0C-C7C5-4CD7-8546-4DBF606E3493}"/>
+                <a16:creationId xmlns:a16="http://schemas.microsoft.com/office/drawing/2014/main" id="{DE74B2C1-D807-49BB-BCA8-38584CEE5F6C}"/>
               </a:ext>
             </a:extLst>
           </p:cNvPr>
@@ -3091,7 +3091,7 @@
     </p:spTree>
     <p:extLst>
       <p:ext uri="{BB962C8B-B14F-4D97-AF65-F5344CB8AC3E}">
-        <p14:creationId xmlns:p14="http://schemas.microsoft.com/office/powerpoint/2010/main" val="1276076631"/>
+        <p14:creationId xmlns:p14="http://schemas.microsoft.com/office/powerpoint/2010/main" val="1983087995"/>
       </p:ext>
     </p:extLst>
   </p:cSld>
@@ -3292,7 +3292,7 @@
           <p:cNvPr id="19" name="">
             <a:extLst xmlns:a="http://schemas.openxmlformats.org/drawingml/2006/main">
               <a:ext uri="{FF2B5EF4-FFF2-40B4-BE49-F238E27FC236}">
-                <a16:creationId xmlns:a16="http://schemas.microsoft.com/office/drawing/2014/main" id="{5C826E48-4A1B-438C-90E7-8977B12F2CD8}"/>
+                <a16:creationId xmlns:a16="http://schemas.microsoft.com/office/drawing/2014/main" id="{049879D2-66B2-4C45-BCD8-AC9CB79D7B71}"/>
               </a:ext>
             </a:extLst>
           </p:cNvPr>
@@ -3324,7 +3324,7 @@
           <p:cNvPr id="2" name="">
             <a:extLst xmlns:a="http://schemas.openxmlformats.org/drawingml/2006/main">
               <a:ext uri="{FF2B5EF4-FFF2-40B4-BE49-F238E27FC236}">
-                <a16:creationId xmlns:a16="http://schemas.microsoft.com/office/drawing/2014/main" id="{00B8655C-11FE-4C7B-AEFE-21FAA0DA3149}"/>
+                <a16:creationId xmlns:a16="http://schemas.microsoft.com/office/drawing/2014/main" id="{BBFF9CCC-60D9-42A8-9229-D43CC35A6A3D}"/>
               </a:ext>
             </a:extLst>
           </p:cNvPr>
@@ -3381,7 +3381,7 @@
           <p:cNvPr id="3" name="">
             <a:extLst xmlns:a="http://schemas.openxmlformats.org/drawingml/2006/main">
               <a:ext uri="{FF2B5EF4-FFF2-40B4-BE49-F238E27FC236}">
-                <a16:creationId xmlns:a16="http://schemas.microsoft.com/office/drawing/2014/main" id="{E2B4C60A-8B87-4F22-965E-2F6CA30C73EE}"/>
+                <a16:creationId xmlns:a16="http://schemas.microsoft.com/office/drawing/2014/main" id="{9BC1A189-C1BE-4F5F-9451-DC9DD73244EC}"/>
               </a:ext>
             </a:extLst>
           </p:cNvPr>
@@ -3413,7 +3413,7 @@
           <p:cNvPr id="4" name="">
             <a:extLst xmlns:a="http://schemas.openxmlformats.org/drawingml/2006/main">
               <a:ext uri="{FF2B5EF4-FFF2-40B4-BE49-F238E27FC236}">
-                <a16:creationId xmlns:a16="http://schemas.microsoft.com/office/drawing/2014/main" id="{2582AC26-97AD-4E6A-99AA-BC466D03A47A}"/>
+                <a16:creationId xmlns:a16="http://schemas.microsoft.com/office/drawing/2014/main" id="{AE617918-CAE1-480E-AC51-42A356BAD5B9}"/>
               </a:ext>
             </a:extLst>
           </p:cNvPr>
@@ -3470,7 +3470,7 @@
           <p:cNvPr id="5" name="">
             <a:extLst xmlns:a="http://schemas.openxmlformats.org/drawingml/2006/main">
               <a:ext uri="{FF2B5EF4-FFF2-40B4-BE49-F238E27FC236}">
-                <a16:creationId xmlns:a16="http://schemas.microsoft.com/office/drawing/2014/main" id="{1A63AB9E-85E6-4E79-BAC0-F1274AA34BC3}"/>
+                <a16:creationId xmlns:a16="http://schemas.microsoft.com/office/drawing/2014/main" id="{AA570CA5-7625-4E37-ACC4-35E7D496C520}"/>
               </a:ext>
             </a:extLst>
           </p:cNvPr>
@@ -3527,7 +3527,7 @@
           <p:cNvPr id="6" name="">
             <a:extLst xmlns:a="http://schemas.openxmlformats.org/drawingml/2006/main">
               <a:ext uri="{FF2B5EF4-FFF2-40B4-BE49-F238E27FC236}">
-                <a16:creationId xmlns:a16="http://schemas.microsoft.com/office/drawing/2014/main" id="{2C229A69-E874-425F-B84C-6BDD75A924CE}"/>
+                <a16:creationId xmlns:a16="http://schemas.microsoft.com/office/drawing/2014/main" id="{55B43788-96CC-422F-80B7-EC2BE38E59E3}"/>
               </a:ext>
             </a:extLst>
           </p:cNvPr>
@@ -3584,7 +3584,7 @@
           <p:cNvPr id="7" name="">
             <a:extLst xmlns:a="http://schemas.openxmlformats.org/drawingml/2006/main">
               <a:ext uri="{FF2B5EF4-FFF2-40B4-BE49-F238E27FC236}">
-                <a16:creationId xmlns:a16="http://schemas.microsoft.com/office/drawing/2014/main" id="{3EAB88D9-8386-4A0A-B3D2-235E2E840C3B}"/>
+                <a16:creationId xmlns:a16="http://schemas.microsoft.com/office/drawing/2014/main" id="{07FE6E1C-29EA-4FF7-80BF-047077A85CD2}"/>
               </a:ext>
             </a:extLst>
           </p:cNvPr>
@@ -3616,7 +3616,7 @@
           <p:cNvPr id="8" name="">
             <a:extLst xmlns:a="http://schemas.openxmlformats.org/drawingml/2006/main">
               <a:ext uri="{FF2B5EF4-FFF2-40B4-BE49-F238E27FC236}">
-                <a16:creationId xmlns:a16="http://schemas.microsoft.com/office/drawing/2014/main" id="{753DF92D-0AF2-4FCF-B233-654358D92650}"/>
+                <a16:creationId xmlns:a16="http://schemas.microsoft.com/office/drawing/2014/main" id="{C3457F89-F3AC-4CC2-AEB3-A2042EB9EC53}"/>
               </a:ext>
             </a:extLst>
           </p:cNvPr>
@@ -3673,7 +3673,7 @@
           <p:cNvPr id="9" name="">
             <a:extLst xmlns:a="http://schemas.openxmlformats.org/drawingml/2006/main">
               <a:ext uri="{FF2B5EF4-FFF2-40B4-BE49-F238E27FC236}">
-                <a16:creationId xmlns:a16="http://schemas.microsoft.com/office/drawing/2014/main" id="{4C3CB87D-E6AA-4124-8FCE-A27ED9746E30}"/>
+                <a16:creationId xmlns:a16="http://schemas.microsoft.com/office/drawing/2014/main" id="{47C44982-98DE-4598-B118-E0D6FAB5E63F}"/>
               </a:ext>
             </a:extLst>
           </p:cNvPr>
@@ -3730,7 +3730,7 @@
           <p:cNvPr id="10" name="">
             <a:extLst xmlns:a="http://schemas.openxmlformats.org/drawingml/2006/main">
               <a:ext uri="{FF2B5EF4-FFF2-40B4-BE49-F238E27FC236}">
-                <a16:creationId xmlns:a16="http://schemas.microsoft.com/office/drawing/2014/main" id="{75ED3E7D-ED5F-473F-B59A-2255D700E14B}"/>
+                <a16:creationId xmlns:a16="http://schemas.microsoft.com/office/drawing/2014/main" id="{228152B7-9C82-44D1-8FD7-925019E1D90D}"/>
               </a:ext>
             </a:extLst>
           </p:cNvPr>
@@ -3787,7 +3787,7 @@
           <p:cNvPr id="11" name="">
             <a:extLst xmlns:a="http://schemas.openxmlformats.org/drawingml/2006/main">
               <a:ext uri="{FF2B5EF4-FFF2-40B4-BE49-F238E27FC236}">
-                <a16:creationId xmlns:a16="http://schemas.microsoft.com/office/drawing/2014/main" id="{9C5CFEC1-2527-4ABD-9ED0-FF116341DDA3}"/>
+                <a16:creationId xmlns:a16="http://schemas.microsoft.com/office/drawing/2014/main" id="{8B24193E-2318-46B0-B1E9-7B0DE34FDCC8}"/>
               </a:ext>
             </a:extLst>
           </p:cNvPr>
@@ -3821,7 +3821,7 @@
           <p:cNvPr id="12" name="">
             <a:extLst xmlns:a="http://schemas.openxmlformats.org/drawingml/2006/main">
               <a:ext uri="{FF2B5EF4-FFF2-40B4-BE49-F238E27FC236}">
-                <a16:creationId xmlns:a16="http://schemas.microsoft.com/office/drawing/2014/main" id="{DEF05C79-C3FC-474F-A349-1A8C5ADE03F2}"/>
+                <a16:creationId xmlns:a16="http://schemas.microsoft.com/office/drawing/2014/main" id="{E3A1D81D-C3D8-4ECF-8AE0-2C075568D1A1}"/>
               </a:ext>
             </a:extLst>
           </p:cNvPr>
@@ -3878,7 +3878,7 @@
           <p:cNvPr id="13" name="">
             <a:extLst xmlns:a="http://schemas.openxmlformats.org/drawingml/2006/main">
               <a:ext uri="{FF2B5EF4-FFF2-40B4-BE49-F238E27FC236}">
-                <a16:creationId xmlns:a16="http://schemas.microsoft.com/office/drawing/2014/main" id="{A074B814-0DF8-4836-8343-44995D04FD17}"/>
+                <a16:creationId xmlns:a16="http://schemas.microsoft.com/office/drawing/2014/main" id="{58CFD707-8A21-459C-9BFA-5A05A30455BA}"/>
               </a:ext>
             </a:extLst>
           </p:cNvPr>
@@ -3935,7 +3935,7 @@
           <p:cNvPr id="14" name="">
             <a:extLst xmlns:a="http://schemas.openxmlformats.org/drawingml/2006/main">
               <a:ext uri="{FF2B5EF4-FFF2-40B4-BE49-F238E27FC236}">
-                <a16:creationId xmlns:a16="http://schemas.microsoft.com/office/drawing/2014/main" id="{DE32E492-B0F2-43F7-9A3C-87CCC1CF3FB4}"/>
+                <a16:creationId xmlns:a16="http://schemas.microsoft.com/office/drawing/2014/main" id="{2A37A09E-2519-4D22-A29A-6C49DF73D64E}"/>
               </a:ext>
             </a:extLst>
           </p:cNvPr>
@@ -3992,7 +3992,7 @@
           <p:cNvPr id="15" name="">
             <a:extLst xmlns:a="http://schemas.openxmlformats.org/drawingml/2006/main">
               <a:ext uri="{FF2B5EF4-FFF2-40B4-BE49-F238E27FC236}">
-                <a16:creationId xmlns:a16="http://schemas.microsoft.com/office/drawing/2014/main" id="{F286F5B0-5577-47D1-9E55-A68BB7B42A25}"/>
+                <a16:creationId xmlns:a16="http://schemas.microsoft.com/office/drawing/2014/main" id="{8295AAB2-8883-417D-8675-656212067282}"/>
               </a:ext>
             </a:extLst>
           </p:cNvPr>
@@ -4026,7 +4026,7 @@
           <p:cNvPr id="16" name="">
             <a:extLst xmlns:a="http://schemas.openxmlformats.org/drawingml/2006/main">
               <a:ext uri="{FF2B5EF4-FFF2-40B4-BE49-F238E27FC236}">
-                <a16:creationId xmlns:a16="http://schemas.microsoft.com/office/drawing/2014/main" id="{A13D1EEE-9EDD-46D4-842F-FF897C22368A}"/>
+                <a16:creationId xmlns:a16="http://schemas.microsoft.com/office/drawing/2014/main" id="{31390F6D-4607-469D-A6BB-D580B66DE8A9}"/>
               </a:ext>
             </a:extLst>
           </p:cNvPr>
@@ -4083,7 +4083,7 @@
           <p:cNvPr id="17" name="">
             <a:extLst xmlns:a="http://schemas.openxmlformats.org/drawingml/2006/main">
               <a:ext uri="{FF2B5EF4-FFF2-40B4-BE49-F238E27FC236}">
-                <a16:creationId xmlns:a16="http://schemas.microsoft.com/office/drawing/2014/main" id="{A96FE259-F0B4-46AE-9B7D-0EAB45E976D4}"/>
+                <a16:creationId xmlns:a16="http://schemas.microsoft.com/office/drawing/2014/main" id="{3BE3F9FB-2B8D-49F0-BD9C-82BE8E3B528A}"/>
               </a:ext>
             </a:extLst>
           </p:cNvPr>
@@ -4140,7 +4140,7 @@
           <p:cNvPr id="18" name="">
             <a:extLst xmlns:a="http://schemas.openxmlformats.org/drawingml/2006/main">
               <a:ext uri="{FF2B5EF4-FFF2-40B4-BE49-F238E27FC236}">
-                <a16:creationId xmlns:a16="http://schemas.microsoft.com/office/drawing/2014/main" id="{66D1FE9C-01AC-4B52-9F30-80D2FFF19C38}"/>
+                <a16:creationId xmlns:a16="http://schemas.microsoft.com/office/drawing/2014/main" id="{BE507FEA-F72A-4DFC-93EA-E0052AC4D3AA}"/>
               </a:ext>
             </a:extLst>
           </p:cNvPr>
@@ -4195,7 +4195,7 @@
     </p:spTree>
     <p:extLst>
       <p:ext uri="{BB962C8B-B14F-4D97-AF65-F5344CB8AC3E}">
-        <p14:creationId xmlns:p14="http://schemas.microsoft.com/office/powerpoint/2010/main" val="1903302989"/>
+        <p14:creationId xmlns:p14="http://schemas.microsoft.com/office/powerpoint/2010/main" val="90776235"/>
       </p:ext>
     </p:extLst>
   </p:cSld>
@@ -4350,7 +4350,7 @@
           <p:cNvPr id="23" name="">
             <a:extLst xmlns:a="http://schemas.openxmlformats.org/drawingml/2006/main">
               <a:ext uri="{FF2B5EF4-FFF2-40B4-BE49-F238E27FC236}">
-                <a16:creationId xmlns:a16="http://schemas.microsoft.com/office/drawing/2014/main" id="{D27C53BF-2834-45E4-9C41-C2F3989B41D6}"/>
+                <a16:creationId xmlns:a16="http://schemas.microsoft.com/office/drawing/2014/main" id="{FEC6AC3D-277D-4E68-BCC2-BD19EC724FCC}"/>
               </a:ext>
             </a:extLst>
           </p:cNvPr>
@@ -4382,7 +4382,7 @@
           <p:cNvPr id="2" name="">
             <a:extLst xmlns:a="http://schemas.openxmlformats.org/drawingml/2006/main">
               <a:ext uri="{FF2B5EF4-FFF2-40B4-BE49-F238E27FC236}">
-                <a16:creationId xmlns:a16="http://schemas.microsoft.com/office/drawing/2014/main" id="{C71F0219-99DE-4B2A-97FE-3BA8703E68EA}"/>
+                <a16:creationId xmlns:a16="http://schemas.microsoft.com/office/drawing/2014/main" id="{BF8A9F77-F3A8-49D1-8B02-4DB4BDDB1BD7}"/>
               </a:ext>
             </a:extLst>
           </p:cNvPr>
@@ -4439,7 +4439,7 @@
           <p:cNvPr id="3" name="">
             <a:extLst xmlns:a="http://schemas.openxmlformats.org/drawingml/2006/main">
               <a:ext uri="{FF2B5EF4-FFF2-40B4-BE49-F238E27FC236}">
-                <a16:creationId xmlns:a16="http://schemas.microsoft.com/office/drawing/2014/main" id="{6EBC2098-B354-4B64-B6F2-D14A64198FE0}"/>
+                <a16:creationId xmlns:a16="http://schemas.microsoft.com/office/drawing/2014/main" id="{87FB3079-508A-4CC9-95E0-6601E7727D5E}"/>
               </a:ext>
             </a:extLst>
           </p:cNvPr>
@@ -4471,7 +4471,7 @@
           <p:cNvPr id="4" name="">
             <a:extLst xmlns:a="http://schemas.openxmlformats.org/drawingml/2006/main">
               <a:ext uri="{FF2B5EF4-FFF2-40B4-BE49-F238E27FC236}">
-                <a16:creationId xmlns:a16="http://schemas.microsoft.com/office/drawing/2014/main" id="{7E2C24CF-8D0B-4912-9061-1CF1D3CC0E18}"/>
+                <a16:creationId xmlns:a16="http://schemas.microsoft.com/office/drawing/2014/main" id="{29CEC627-49C3-472D-B781-9ACDD6FFB277}"/>
               </a:ext>
             </a:extLst>
           </p:cNvPr>
@@ -4528,7 +4528,7 @@
           <p:cNvPr id="5" name="">
             <a:extLst xmlns:a="http://schemas.openxmlformats.org/drawingml/2006/main">
               <a:ext uri="{FF2B5EF4-FFF2-40B4-BE49-F238E27FC236}">
-                <a16:creationId xmlns:a16="http://schemas.microsoft.com/office/drawing/2014/main" id="{B3A54932-AEB8-4783-93ED-7D726FEAAAD0}"/>
+                <a16:creationId xmlns:a16="http://schemas.microsoft.com/office/drawing/2014/main" id="{3122C498-A5EB-4676-8C57-DD00F0503CDA}"/>
               </a:ext>
             </a:extLst>
           </p:cNvPr>
@@ -4585,7 +4585,7 @@
           <p:cNvPr id="6" name="">
             <a:extLst xmlns:a="http://schemas.openxmlformats.org/drawingml/2006/main">
               <a:ext uri="{FF2B5EF4-FFF2-40B4-BE49-F238E27FC236}">
-                <a16:creationId xmlns:a16="http://schemas.microsoft.com/office/drawing/2014/main" id="{51250DC2-4378-4C1F-BE3A-ECA8D8DE4B92}"/>
+                <a16:creationId xmlns:a16="http://schemas.microsoft.com/office/drawing/2014/main" id="{A7A84C02-D90C-4B71-B068-A0997F005B8C}"/>
               </a:ext>
             </a:extLst>
           </p:cNvPr>
@@ -4642,7 +4642,7 @@
           <p:cNvPr id="7" name="">
             <a:extLst xmlns:a="http://schemas.openxmlformats.org/drawingml/2006/main">
               <a:ext uri="{FF2B5EF4-FFF2-40B4-BE49-F238E27FC236}">
-                <a16:creationId xmlns:a16="http://schemas.microsoft.com/office/drawing/2014/main" id="{00075F8A-9E58-4217-93B1-10B664F60241}"/>
+                <a16:creationId xmlns:a16="http://schemas.microsoft.com/office/drawing/2014/main" id="{23FF8646-D10C-42C2-B045-A7439BB5654D}"/>
               </a:ext>
             </a:extLst>
           </p:cNvPr>
@@ -4674,7 +4674,7 @@
           <p:cNvPr id="8" name="">
             <a:extLst xmlns:a="http://schemas.openxmlformats.org/drawingml/2006/main">
               <a:ext uri="{FF2B5EF4-FFF2-40B4-BE49-F238E27FC236}">
-                <a16:creationId xmlns:a16="http://schemas.microsoft.com/office/drawing/2014/main" id="{BEAD02ED-AB71-495A-AD71-03DBCD5DA0BB}"/>
+                <a16:creationId xmlns:a16="http://schemas.microsoft.com/office/drawing/2014/main" id="{5136AA90-1394-4F0E-AA70-4AF5D9052C52}"/>
               </a:ext>
             </a:extLst>
           </p:cNvPr>
@@ -4731,7 +4731,7 @@
           <p:cNvPr id="9" name="">
             <a:extLst xmlns:a="http://schemas.openxmlformats.org/drawingml/2006/main">
               <a:ext uri="{FF2B5EF4-FFF2-40B4-BE49-F238E27FC236}">
-                <a16:creationId xmlns:a16="http://schemas.microsoft.com/office/drawing/2014/main" id="{F68CEBF1-635B-47E4-82AD-723153A6CF06}"/>
+                <a16:creationId xmlns:a16="http://schemas.microsoft.com/office/drawing/2014/main" id="{C82DB7D8-8AE0-45F7-A795-41A4C403D817}"/>
               </a:ext>
             </a:extLst>
           </p:cNvPr>
@@ -4788,7 +4788,7 @@
           <p:cNvPr id="10" name="">
             <a:extLst xmlns:a="http://schemas.openxmlformats.org/drawingml/2006/main">
               <a:ext uri="{FF2B5EF4-FFF2-40B4-BE49-F238E27FC236}">
-                <a16:creationId xmlns:a16="http://schemas.microsoft.com/office/drawing/2014/main" id="{FAD2E78A-22A9-44DA-A61B-BF66C505F922}"/>
+                <a16:creationId xmlns:a16="http://schemas.microsoft.com/office/drawing/2014/main" id="{19F0F49D-1086-46BE-AFDC-279A1298A26D}"/>
               </a:ext>
             </a:extLst>
           </p:cNvPr>
@@ -4822,7 +4822,7 @@
           <p:cNvPr id="11" name="">
             <a:extLst xmlns:a="http://schemas.openxmlformats.org/drawingml/2006/main">
               <a:ext uri="{FF2B5EF4-FFF2-40B4-BE49-F238E27FC236}">
-                <a16:creationId xmlns:a16="http://schemas.microsoft.com/office/drawing/2014/main" id="{69101E3D-965F-4CC3-8937-D6CDC317E089}"/>
+                <a16:creationId xmlns:a16="http://schemas.microsoft.com/office/drawing/2014/main" id="{EF519BFE-62FC-48E4-9378-08EC9A188DD3}"/>
               </a:ext>
             </a:extLst>
           </p:cNvPr>
@@ -4854,7 +4854,7 @@
           <p:cNvPr id="12" name="">
             <a:extLst xmlns:a="http://schemas.openxmlformats.org/drawingml/2006/main">
               <a:ext uri="{FF2B5EF4-FFF2-40B4-BE49-F238E27FC236}">
-                <a16:creationId xmlns:a16="http://schemas.microsoft.com/office/drawing/2014/main" id="{665CACA3-45ED-4BA1-A1D2-3D0635D98752}"/>
+                <a16:creationId xmlns:a16="http://schemas.microsoft.com/office/drawing/2014/main" id="{9C8E4154-0934-4624-A54C-629FED49B1AA}"/>
               </a:ext>
             </a:extLst>
           </p:cNvPr>
@@ -4911,7 +4911,7 @@
           <p:cNvPr id="13" name="">
             <a:extLst xmlns:a="http://schemas.openxmlformats.org/drawingml/2006/main">
               <a:ext uri="{FF2B5EF4-FFF2-40B4-BE49-F238E27FC236}">
-                <a16:creationId xmlns:a16="http://schemas.microsoft.com/office/drawing/2014/main" id="{A7FD9B37-B7E8-49BC-8843-9B2C36ED6B0D}"/>
+                <a16:creationId xmlns:a16="http://schemas.microsoft.com/office/drawing/2014/main" id="{7D244D01-87D5-4B06-AFC3-A4BBB919C905}"/>
               </a:ext>
             </a:extLst>
           </p:cNvPr>
@@ -4968,7 +4968,7 @@
           <p:cNvPr id="14" name="">
             <a:extLst xmlns:a="http://schemas.openxmlformats.org/drawingml/2006/main">
               <a:ext uri="{FF2B5EF4-FFF2-40B4-BE49-F238E27FC236}">
-                <a16:creationId xmlns:a16="http://schemas.microsoft.com/office/drawing/2014/main" id="{6F1F33B0-5724-49C4-9190-964DFB24D764}"/>
+                <a16:creationId xmlns:a16="http://schemas.microsoft.com/office/drawing/2014/main" id="{40F17FF5-DF3B-48F9-8B51-701BFF04C97B}"/>
               </a:ext>
             </a:extLst>
           </p:cNvPr>
@@ -5002,7 +5002,7 @@
           <p:cNvPr id="15" name="">
             <a:extLst xmlns:a="http://schemas.openxmlformats.org/drawingml/2006/main">
               <a:ext uri="{FF2B5EF4-FFF2-40B4-BE49-F238E27FC236}">
-                <a16:creationId xmlns:a16="http://schemas.microsoft.com/office/drawing/2014/main" id="{81ABE1CD-9A85-49F0-94B3-C36B747EB37C}"/>
+                <a16:creationId xmlns:a16="http://schemas.microsoft.com/office/drawing/2014/main" id="{A05F6408-4EE5-4CB8-8256-9A35AF4AAA84}"/>
               </a:ext>
             </a:extLst>
           </p:cNvPr>
@@ -5034,7 +5034,7 @@
           <p:cNvPr id="16" name="">
             <a:extLst xmlns:a="http://schemas.openxmlformats.org/drawingml/2006/main">
               <a:ext uri="{FF2B5EF4-FFF2-40B4-BE49-F238E27FC236}">
-                <a16:creationId xmlns:a16="http://schemas.microsoft.com/office/drawing/2014/main" id="{CE9BD3E7-7F19-4A02-84C0-EF83B772F32B}"/>
+                <a16:creationId xmlns:a16="http://schemas.microsoft.com/office/drawing/2014/main" id="{15D36782-8DAB-416D-A060-79D7E5684AB1}"/>
               </a:ext>
             </a:extLst>
           </p:cNvPr>
@@ -5091,7 +5091,7 @@
           <p:cNvPr id="17" name="">
             <a:extLst xmlns:a="http://schemas.openxmlformats.org/drawingml/2006/main">
               <a:ext uri="{FF2B5EF4-FFF2-40B4-BE49-F238E27FC236}">
-                <a16:creationId xmlns:a16="http://schemas.microsoft.com/office/drawing/2014/main" id="{A804CAFC-E629-4DDC-B495-FF4C2E57009B}"/>
+                <a16:creationId xmlns:a16="http://schemas.microsoft.com/office/drawing/2014/main" id="{4ED102D4-186C-469B-92C4-8AB78908F22E}"/>
               </a:ext>
             </a:extLst>
           </p:cNvPr>
@@ -5148,7 +5148,7 @@
           <p:cNvPr id="18" name="">
             <a:extLst xmlns:a="http://schemas.openxmlformats.org/drawingml/2006/main">
               <a:ext uri="{FF2B5EF4-FFF2-40B4-BE49-F238E27FC236}">
-                <a16:creationId xmlns:a16="http://schemas.microsoft.com/office/drawing/2014/main" id="{A3302A1B-7034-41EE-94A4-9A96359F68DD}"/>
+                <a16:creationId xmlns:a16="http://schemas.microsoft.com/office/drawing/2014/main" id="{6EF33C88-1D56-489B-BAE6-AC0F9F8B956B}"/>
               </a:ext>
             </a:extLst>
           </p:cNvPr>
@@ -5182,7 +5182,7 @@
           <p:cNvPr id="19" name="">
             <a:extLst xmlns:a="http://schemas.openxmlformats.org/drawingml/2006/main">
               <a:ext uri="{FF2B5EF4-FFF2-40B4-BE49-F238E27FC236}">
-                <a16:creationId xmlns:a16="http://schemas.microsoft.com/office/drawing/2014/main" id="{86B51769-5694-47EC-9536-3A063D1C29EA}"/>
+                <a16:creationId xmlns:a16="http://schemas.microsoft.com/office/drawing/2014/main" id="{E541E6FD-46DC-415E-928A-CF63F3F4F09B}"/>
               </a:ext>
             </a:extLst>
           </p:cNvPr>
@@ -5214,7 +5214,7 @@
           <p:cNvPr id="20" name="">
             <a:extLst xmlns:a="http://schemas.openxmlformats.org/drawingml/2006/main">
               <a:ext uri="{FF2B5EF4-FFF2-40B4-BE49-F238E27FC236}">
-                <a16:creationId xmlns:a16="http://schemas.microsoft.com/office/drawing/2014/main" id="{8CF4B770-86C0-44E3-B47F-3E89CAFB051B}"/>
+                <a16:creationId xmlns:a16="http://schemas.microsoft.com/office/drawing/2014/main" id="{479BBF77-1B7E-43EE-99A8-CB1AE7493591}"/>
               </a:ext>
             </a:extLst>
           </p:cNvPr>
@@ -5271,7 +5271,7 @@
           <p:cNvPr id="21" name="">
             <a:extLst xmlns:a="http://schemas.openxmlformats.org/drawingml/2006/main">
               <a:ext uri="{FF2B5EF4-FFF2-40B4-BE49-F238E27FC236}">
-                <a16:creationId xmlns:a16="http://schemas.microsoft.com/office/drawing/2014/main" id="{FC1B588A-4685-403A-9B03-628E3A58D1C2}"/>
+                <a16:creationId xmlns:a16="http://schemas.microsoft.com/office/drawing/2014/main" id="{ED1270D4-7905-488D-8995-A156708F9B71}"/>
               </a:ext>
             </a:extLst>
           </p:cNvPr>
@@ -5328,7 +5328,7 @@
           <p:cNvPr id="22" name="">
             <a:extLst xmlns:a="http://schemas.openxmlformats.org/drawingml/2006/main">
               <a:ext uri="{FF2B5EF4-FFF2-40B4-BE49-F238E27FC236}">
-                <a16:creationId xmlns:a16="http://schemas.microsoft.com/office/drawing/2014/main" id="{D0048A5E-79C9-4B7F-A0C2-10BBEEB540DE}"/>
+                <a16:creationId xmlns:a16="http://schemas.microsoft.com/office/drawing/2014/main" id="{B4753E05-1C6B-487D-B9BE-39AFEDBAFE41}"/>
               </a:ext>
             </a:extLst>
           </p:cNvPr>
@@ -5383,7 +5383,7 @@
     </p:spTree>
     <p:extLst>
       <p:ext uri="{BB962C8B-B14F-4D97-AF65-F5344CB8AC3E}">
-        <p14:creationId xmlns:p14="http://schemas.microsoft.com/office/powerpoint/2010/main" val="1575697600"/>
+        <p14:creationId xmlns:p14="http://schemas.microsoft.com/office/powerpoint/2010/main" val="1687791662"/>
       </p:ext>
     </p:extLst>
   </p:cSld>
@@ -5584,7 +5584,7 @@
           <p:cNvPr id="23" name="">
             <a:extLst xmlns:a="http://schemas.openxmlformats.org/drawingml/2006/main">
               <a:ext uri="{FF2B5EF4-FFF2-40B4-BE49-F238E27FC236}">
-                <a16:creationId xmlns:a16="http://schemas.microsoft.com/office/drawing/2014/main" id="{1CA45419-D729-43D5-85DE-50DC8EFDEB4C}"/>
+                <a16:creationId xmlns:a16="http://schemas.microsoft.com/office/drawing/2014/main" id="{CD3A2040-72C5-4E6F-9E54-48F258840399}"/>
               </a:ext>
             </a:extLst>
           </p:cNvPr>
@@ -5616,7 +5616,7 @@
           <p:cNvPr id="2" name="">
             <a:extLst xmlns:a="http://schemas.openxmlformats.org/drawingml/2006/main">
               <a:ext uri="{FF2B5EF4-FFF2-40B4-BE49-F238E27FC236}">
-                <a16:creationId xmlns:a16="http://schemas.microsoft.com/office/drawing/2014/main" id="{A85B003E-825A-4178-9B94-F79D1C641ABE}"/>
+                <a16:creationId xmlns:a16="http://schemas.microsoft.com/office/drawing/2014/main" id="{19A59868-1AE6-4178-BFAC-349D0F4296E3}"/>
               </a:ext>
             </a:extLst>
           </p:cNvPr>
@@ -5673,7 +5673,7 @@
           <p:cNvPr id="3" name="">
             <a:extLst xmlns:a="http://schemas.openxmlformats.org/drawingml/2006/main">
               <a:ext uri="{FF2B5EF4-FFF2-40B4-BE49-F238E27FC236}">
-                <a16:creationId xmlns:a16="http://schemas.microsoft.com/office/drawing/2014/main" id="{76B07792-DE7E-4C42-88FC-4C88DCDF3767}"/>
+                <a16:creationId xmlns:a16="http://schemas.microsoft.com/office/drawing/2014/main" id="{7B4282DC-F289-45AE-AA0B-AEC9A9A691DA}"/>
               </a:ext>
             </a:extLst>
           </p:cNvPr>
@@ -5705,7 +5705,7 @@
           <p:cNvPr id="4" name="">
             <a:extLst xmlns:a="http://schemas.openxmlformats.org/drawingml/2006/main">
               <a:ext uri="{FF2B5EF4-FFF2-40B4-BE49-F238E27FC236}">
-                <a16:creationId xmlns:a16="http://schemas.microsoft.com/office/drawing/2014/main" id="{1FD4BC4B-C15E-4EB5-B235-09F121AB5C0A}"/>
+                <a16:creationId xmlns:a16="http://schemas.microsoft.com/office/drawing/2014/main" id="{1FDB3C25-B577-41C8-8EF5-6BD02E388403}"/>
               </a:ext>
             </a:extLst>
           </p:cNvPr>
@@ -5762,7 +5762,7 @@
           <p:cNvPr id="5" name="">
             <a:extLst xmlns:a="http://schemas.openxmlformats.org/drawingml/2006/main">
               <a:ext uri="{FF2B5EF4-FFF2-40B4-BE49-F238E27FC236}">
-                <a16:creationId xmlns:a16="http://schemas.microsoft.com/office/drawing/2014/main" id="{ADAA990A-0517-494E-BA83-1B53867D0721}"/>
+                <a16:creationId xmlns:a16="http://schemas.microsoft.com/office/drawing/2014/main" id="{13B07954-8262-4421-9FFB-4D38830C1BAC}"/>
               </a:ext>
             </a:extLst>
           </p:cNvPr>
@@ -5819,7 +5819,7 @@
           <p:cNvPr id="6" name="">
             <a:extLst xmlns:a="http://schemas.openxmlformats.org/drawingml/2006/main">
               <a:ext uri="{FF2B5EF4-FFF2-40B4-BE49-F238E27FC236}">
-                <a16:creationId xmlns:a16="http://schemas.microsoft.com/office/drawing/2014/main" id="{B4001AE3-7B89-4BE6-8883-7095D839FB88}"/>
+                <a16:creationId xmlns:a16="http://schemas.microsoft.com/office/drawing/2014/main" id="{6E04E039-F77F-4427-A955-F687BC158DA0}"/>
               </a:ext>
             </a:extLst>
           </p:cNvPr>
@@ -5876,7 +5876,7 @@
           <p:cNvPr id="7" name="">
             <a:extLst xmlns:a="http://schemas.openxmlformats.org/drawingml/2006/main">
               <a:ext uri="{FF2B5EF4-FFF2-40B4-BE49-F238E27FC236}">
-                <a16:creationId xmlns:a16="http://schemas.microsoft.com/office/drawing/2014/main" id="{5B1913F1-8D1F-4382-BA7C-0771071A6783}"/>
+                <a16:creationId xmlns:a16="http://schemas.microsoft.com/office/drawing/2014/main" id="{9DB72DC5-72B9-42F2-B6AA-9BE2610A387E}"/>
               </a:ext>
             </a:extLst>
           </p:cNvPr>
@@ -5908,7 +5908,7 @@
           <p:cNvPr id="8" name="">
             <a:extLst xmlns:a="http://schemas.openxmlformats.org/drawingml/2006/main">
               <a:ext uri="{FF2B5EF4-FFF2-40B4-BE49-F238E27FC236}">
-                <a16:creationId xmlns:a16="http://schemas.microsoft.com/office/drawing/2014/main" id="{016BD218-EB26-4754-820D-98E0E9CB49D3}"/>
+                <a16:creationId xmlns:a16="http://schemas.microsoft.com/office/drawing/2014/main" id="{BF2A4D1C-786B-41B6-B457-573E3A806F60}"/>
               </a:ext>
             </a:extLst>
           </p:cNvPr>
@@ -5965,7 +5965,7 @@
           <p:cNvPr id="9" name="">
             <a:extLst xmlns:a="http://schemas.openxmlformats.org/drawingml/2006/main">
               <a:ext uri="{FF2B5EF4-FFF2-40B4-BE49-F238E27FC236}">
-                <a16:creationId xmlns:a16="http://schemas.microsoft.com/office/drawing/2014/main" id="{C9D9E4A1-54FC-4B75-95F1-F6597051220D}"/>
+                <a16:creationId xmlns:a16="http://schemas.microsoft.com/office/drawing/2014/main" id="{A48F4E3F-B211-43F8-BA26-466AE9E7E4A8}"/>
               </a:ext>
             </a:extLst>
           </p:cNvPr>
@@ -6022,7 +6022,7 @@
           <p:cNvPr id="10" name="">
             <a:extLst xmlns:a="http://schemas.openxmlformats.org/drawingml/2006/main">
               <a:ext uri="{FF2B5EF4-FFF2-40B4-BE49-F238E27FC236}">
-                <a16:creationId xmlns:a16="http://schemas.microsoft.com/office/drawing/2014/main" id="{6301A82B-4F01-4B56-B28F-7EB4BA1FD57F}"/>
+                <a16:creationId xmlns:a16="http://schemas.microsoft.com/office/drawing/2014/main" id="{9CD335F0-8BC4-4A5E-B2F0-11AA65B5A23C}"/>
               </a:ext>
             </a:extLst>
           </p:cNvPr>
@@ -6056,7 +6056,7 @@
           <p:cNvPr id="11" name="">
             <a:extLst xmlns:a="http://schemas.openxmlformats.org/drawingml/2006/main">
               <a:ext uri="{FF2B5EF4-FFF2-40B4-BE49-F238E27FC236}">
-                <a16:creationId xmlns:a16="http://schemas.microsoft.com/office/drawing/2014/main" id="{534BB8F3-3C66-4584-A129-523F3E680A6A}"/>
+                <a16:creationId xmlns:a16="http://schemas.microsoft.com/office/drawing/2014/main" id="{64D3E51E-228A-434F-8E70-7C1A12425E4F}"/>
               </a:ext>
             </a:extLst>
           </p:cNvPr>
@@ -6088,7 +6088,7 @@
           <p:cNvPr id="12" name="">
             <a:extLst xmlns:a="http://schemas.openxmlformats.org/drawingml/2006/main">
               <a:ext uri="{FF2B5EF4-FFF2-40B4-BE49-F238E27FC236}">
-                <a16:creationId xmlns:a16="http://schemas.microsoft.com/office/drawing/2014/main" id="{8BDECBB2-8F1C-4A5D-8824-AF33EC9DABD3}"/>
+                <a16:creationId xmlns:a16="http://schemas.microsoft.com/office/drawing/2014/main" id="{7D3A47F0-1B5A-4454-897F-A0B4B2A92310}"/>
               </a:ext>
             </a:extLst>
           </p:cNvPr>
@@ -6145,7 +6145,7 @@
           <p:cNvPr id="13" name="">
             <a:extLst xmlns:a="http://schemas.openxmlformats.org/drawingml/2006/main">
               <a:ext uri="{FF2B5EF4-FFF2-40B4-BE49-F238E27FC236}">
-                <a16:creationId xmlns:a16="http://schemas.microsoft.com/office/drawing/2014/main" id="{AC99DC47-8EB8-4BC0-A3EC-1CEBE27B058A}"/>
+                <a16:creationId xmlns:a16="http://schemas.microsoft.com/office/drawing/2014/main" id="{95742818-F665-44E8-9169-7BDECA477CB3}"/>
               </a:ext>
             </a:extLst>
           </p:cNvPr>
@@ -6202,7 +6202,7 @@
           <p:cNvPr id="14" name="">
             <a:extLst xmlns:a="http://schemas.openxmlformats.org/drawingml/2006/main">
               <a:ext uri="{FF2B5EF4-FFF2-40B4-BE49-F238E27FC236}">
-                <a16:creationId xmlns:a16="http://schemas.microsoft.com/office/drawing/2014/main" id="{2FF83E23-CCF3-4EBA-BBE3-2B4FDD9E7ADF}"/>
+                <a16:creationId xmlns:a16="http://schemas.microsoft.com/office/drawing/2014/main" id="{7DCD40A3-B35D-4B43-8D19-82E63518F936}"/>
               </a:ext>
             </a:extLst>
           </p:cNvPr>
@@ -6236,7 +6236,7 @@
           <p:cNvPr id="15" name="">
             <a:extLst xmlns:a="http://schemas.openxmlformats.org/drawingml/2006/main">
               <a:ext uri="{FF2B5EF4-FFF2-40B4-BE49-F238E27FC236}">
-                <a16:creationId xmlns:a16="http://schemas.microsoft.com/office/drawing/2014/main" id="{3E3C7120-EED7-4284-8AC1-AD52DA8AE5D5}"/>
+                <a16:creationId xmlns:a16="http://schemas.microsoft.com/office/drawing/2014/main" id="{9625CABA-E418-4A80-9672-88D9C71A6031}"/>
               </a:ext>
             </a:extLst>
           </p:cNvPr>
@@ -6268,7 +6268,7 @@
           <p:cNvPr id="16" name="">
             <a:extLst xmlns:a="http://schemas.openxmlformats.org/drawingml/2006/main">
               <a:ext uri="{FF2B5EF4-FFF2-40B4-BE49-F238E27FC236}">
-                <a16:creationId xmlns:a16="http://schemas.microsoft.com/office/drawing/2014/main" id="{BABEDD70-11AB-425C-910F-8CB3AE4340E3}"/>
+                <a16:creationId xmlns:a16="http://schemas.microsoft.com/office/drawing/2014/main" id="{E1C2536E-D046-4A09-860A-7BEDFC4A1D38}"/>
               </a:ext>
             </a:extLst>
           </p:cNvPr>
@@ -6325,7 +6325,7 @@
           <p:cNvPr id="17" name="">
             <a:extLst xmlns:a="http://schemas.openxmlformats.org/drawingml/2006/main">
               <a:ext uri="{FF2B5EF4-FFF2-40B4-BE49-F238E27FC236}">
-                <a16:creationId xmlns:a16="http://schemas.microsoft.com/office/drawing/2014/main" id="{11AB35C9-C0C4-43F5-A910-D5925CD56127}"/>
+                <a16:creationId xmlns:a16="http://schemas.microsoft.com/office/drawing/2014/main" id="{68392E17-C64D-4546-BCB1-01F58C48AE2D}"/>
               </a:ext>
             </a:extLst>
           </p:cNvPr>
@@ -6382,7 +6382,7 @@
           <p:cNvPr id="18" name="">
             <a:extLst xmlns:a="http://schemas.openxmlformats.org/drawingml/2006/main">
               <a:ext uri="{FF2B5EF4-FFF2-40B4-BE49-F238E27FC236}">
-                <a16:creationId xmlns:a16="http://schemas.microsoft.com/office/drawing/2014/main" id="{C3BC2F02-0015-4307-8CD9-045719C6B444}"/>
+                <a16:creationId xmlns:a16="http://schemas.microsoft.com/office/drawing/2014/main" id="{A1827E0D-0216-4B06-BB26-F755DAA896BE}"/>
               </a:ext>
             </a:extLst>
           </p:cNvPr>
@@ -6416,7 +6416,7 @@
           <p:cNvPr id="19" name="">
             <a:extLst xmlns:a="http://schemas.openxmlformats.org/drawingml/2006/main">
               <a:ext uri="{FF2B5EF4-FFF2-40B4-BE49-F238E27FC236}">
-                <a16:creationId xmlns:a16="http://schemas.microsoft.com/office/drawing/2014/main" id="{D19ACF3D-4CC5-4A21-A447-73B341EE7294}"/>
+                <a16:creationId xmlns:a16="http://schemas.microsoft.com/office/drawing/2014/main" id="{8CC3A750-BB31-46E5-B779-4BC9DC174997}"/>
               </a:ext>
             </a:extLst>
           </p:cNvPr>
@@ -6448,7 +6448,7 @@
           <p:cNvPr id="20" name="">
             <a:extLst xmlns:a="http://schemas.openxmlformats.org/drawingml/2006/main">
               <a:ext uri="{FF2B5EF4-FFF2-40B4-BE49-F238E27FC236}">
-                <a16:creationId xmlns:a16="http://schemas.microsoft.com/office/drawing/2014/main" id="{1D23F896-D937-4DAE-99F5-1C469799DB3D}"/>
+                <a16:creationId xmlns:a16="http://schemas.microsoft.com/office/drawing/2014/main" id="{268F9EA4-ABB7-45B0-9F19-0ACD2EB97C38}"/>
               </a:ext>
             </a:extLst>
           </p:cNvPr>
@@ -6505,7 +6505,7 @@
           <p:cNvPr id="21" name="">
             <a:extLst xmlns:a="http://schemas.openxmlformats.org/drawingml/2006/main">
               <a:ext uri="{FF2B5EF4-FFF2-40B4-BE49-F238E27FC236}">
-                <a16:creationId xmlns:a16="http://schemas.microsoft.com/office/drawing/2014/main" id="{A65049DE-FC10-4F7A-9755-7CB9D018234E}"/>
+                <a16:creationId xmlns:a16="http://schemas.microsoft.com/office/drawing/2014/main" id="{3822FE48-5BA4-45FD-BC0D-77130B0A98A3}"/>
               </a:ext>
             </a:extLst>
           </p:cNvPr>
@@ -6562,7 +6562,7 @@
           <p:cNvPr id="22" name="">
             <a:extLst xmlns:a="http://schemas.openxmlformats.org/drawingml/2006/main">
               <a:ext uri="{FF2B5EF4-FFF2-40B4-BE49-F238E27FC236}">
-                <a16:creationId xmlns:a16="http://schemas.microsoft.com/office/drawing/2014/main" id="{F6171168-D6F9-45E7-A874-3584CCE36341}"/>
+                <a16:creationId xmlns:a16="http://schemas.microsoft.com/office/drawing/2014/main" id="{BBD3DD41-BFEB-4BC7-A8D8-309E4E9EAE49}"/>
               </a:ext>
             </a:extLst>
           </p:cNvPr>
@@ -6617,7 +6617,7 @@
     </p:spTree>
     <p:extLst>
       <p:ext uri="{BB962C8B-B14F-4D97-AF65-F5344CB8AC3E}">
-        <p14:creationId xmlns:p14="http://schemas.microsoft.com/office/powerpoint/2010/main" val="2102882380"/>
+        <p14:creationId xmlns:p14="http://schemas.microsoft.com/office/powerpoint/2010/main" val="44897619"/>
       </p:ext>
     </p:extLst>
   </p:cSld>
@@ -6818,7 +6818,7 @@
           <p:cNvPr id="16" name="">
             <a:extLst xmlns:a="http://schemas.openxmlformats.org/drawingml/2006/main">
               <a:ext uri="{FF2B5EF4-FFF2-40B4-BE49-F238E27FC236}">
-                <a16:creationId xmlns:a16="http://schemas.microsoft.com/office/drawing/2014/main" id="{3035106F-8664-4E67-96D9-36652AE75141}"/>
+                <a16:creationId xmlns:a16="http://schemas.microsoft.com/office/drawing/2014/main" id="{4E3FBA5C-475B-4038-B08C-7E065C278EA4}"/>
               </a:ext>
             </a:extLst>
           </p:cNvPr>
@@ -6850,7 +6850,7 @@
           <p:cNvPr id="2" name="">
             <a:extLst xmlns:a="http://schemas.openxmlformats.org/drawingml/2006/main">
               <a:ext uri="{FF2B5EF4-FFF2-40B4-BE49-F238E27FC236}">
-                <a16:creationId xmlns:a16="http://schemas.microsoft.com/office/drawing/2014/main" id="{A4337B8B-77CB-4143-A6D5-A017F5142EC6}"/>
+                <a16:creationId xmlns:a16="http://schemas.microsoft.com/office/drawing/2014/main" id="{AC8EAE1D-A25E-4304-8EBB-915EAA03EDCC}"/>
               </a:ext>
             </a:extLst>
           </p:cNvPr>
@@ -6907,7 +6907,7 @@
           <p:cNvPr id="3" name="">
             <a:extLst xmlns:a="http://schemas.openxmlformats.org/drawingml/2006/main">
               <a:ext uri="{FF2B5EF4-FFF2-40B4-BE49-F238E27FC236}">
-                <a16:creationId xmlns:a16="http://schemas.microsoft.com/office/drawing/2014/main" id="{D747107B-2A5E-43C3-9088-DDA9F9BECB5A}"/>
+                <a16:creationId xmlns:a16="http://schemas.microsoft.com/office/drawing/2014/main" id="{E93E325F-9F8B-4B39-B5EB-D09826256CDF}"/>
               </a:ext>
             </a:extLst>
           </p:cNvPr>
@@ -6939,7 +6939,7 @@
           <p:cNvPr id="4" name="">
             <a:extLst xmlns:a="http://schemas.openxmlformats.org/drawingml/2006/main">
               <a:ext uri="{FF2B5EF4-FFF2-40B4-BE49-F238E27FC236}">
-                <a16:creationId xmlns:a16="http://schemas.microsoft.com/office/drawing/2014/main" id="{FCC55D6B-FBB4-4B91-BA7C-36E6435723AB}"/>
+                <a16:creationId xmlns:a16="http://schemas.microsoft.com/office/drawing/2014/main" id="{CC17AC32-49DA-43B2-8653-C69B8A3808A2}"/>
               </a:ext>
             </a:extLst>
           </p:cNvPr>
@@ -6996,7 +6996,7 @@
           <p:cNvPr id="5" name="">
             <a:extLst xmlns:a="http://schemas.openxmlformats.org/drawingml/2006/main">
               <a:ext uri="{FF2B5EF4-FFF2-40B4-BE49-F238E27FC236}">
-                <a16:creationId xmlns:a16="http://schemas.microsoft.com/office/drawing/2014/main" id="{3A6A802B-52A6-4C42-A789-FFF87ACF8F70}"/>
+                <a16:creationId xmlns:a16="http://schemas.microsoft.com/office/drawing/2014/main" id="{C7D064C8-D507-403F-A292-94339CED6023}"/>
               </a:ext>
             </a:extLst>
           </p:cNvPr>
@@ -7053,7 +7053,7 @@
           <p:cNvPr id="6" name="">
             <a:extLst xmlns:a="http://schemas.openxmlformats.org/drawingml/2006/main">
               <a:ext uri="{FF2B5EF4-FFF2-40B4-BE49-F238E27FC236}">
-                <a16:creationId xmlns:a16="http://schemas.microsoft.com/office/drawing/2014/main" id="{6875FFF0-0480-4542-B7C6-7EF73CF11EFC}"/>
+                <a16:creationId xmlns:a16="http://schemas.microsoft.com/office/drawing/2014/main" id="{340C76BE-118F-4B08-B365-2D5C59236F60}"/>
               </a:ext>
             </a:extLst>
           </p:cNvPr>
@@ -7110,7 +7110,7 @@
           <p:cNvPr id="7" name="">
             <a:extLst xmlns:a="http://schemas.openxmlformats.org/drawingml/2006/main">
               <a:ext uri="{FF2B5EF4-FFF2-40B4-BE49-F238E27FC236}">
-                <a16:creationId xmlns:a16="http://schemas.microsoft.com/office/drawing/2014/main" id="{1AE4792A-B25A-4CD1-9F5F-3726A0952387}"/>
+                <a16:creationId xmlns:a16="http://schemas.microsoft.com/office/drawing/2014/main" id="{F2A24EF1-0D35-4C51-9D08-00CFF9133D48}"/>
               </a:ext>
             </a:extLst>
           </p:cNvPr>
@@ -7142,7 +7142,7 @@
           <p:cNvPr id="8" name="">
             <a:extLst xmlns:a="http://schemas.openxmlformats.org/drawingml/2006/main">
               <a:ext uri="{FF2B5EF4-FFF2-40B4-BE49-F238E27FC236}">
-                <a16:creationId xmlns:a16="http://schemas.microsoft.com/office/drawing/2014/main" id="{A47469F8-7AE3-4F92-9D57-33EAB3526B62}"/>
+                <a16:creationId xmlns:a16="http://schemas.microsoft.com/office/drawing/2014/main" id="{072F8434-A0C6-4CC3-978D-5E4034E1D687}"/>
               </a:ext>
             </a:extLst>
           </p:cNvPr>
@@ -7199,7 +7199,7 @@
           <p:cNvPr id="9" name="">
             <a:extLst xmlns:a="http://schemas.openxmlformats.org/drawingml/2006/main">
               <a:ext uri="{FF2B5EF4-FFF2-40B4-BE49-F238E27FC236}">
-                <a16:creationId xmlns:a16="http://schemas.microsoft.com/office/drawing/2014/main" id="{2111F9EA-F603-4C59-8E50-B4888E401A5C}"/>
+                <a16:creationId xmlns:a16="http://schemas.microsoft.com/office/drawing/2014/main" id="{721DB787-3E7E-47B1-AF2D-D626C456D08B}"/>
               </a:ext>
             </a:extLst>
           </p:cNvPr>
@@ -7256,7 +7256,7 @@
           <p:cNvPr id="10" name="">
             <a:extLst xmlns:a="http://schemas.openxmlformats.org/drawingml/2006/main">
               <a:ext uri="{FF2B5EF4-FFF2-40B4-BE49-F238E27FC236}">
-                <a16:creationId xmlns:a16="http://schemas.microsoft.com/office/drawing/2014/main" id="{D9AD7A0F-01C5-4950-B6D4-4718C4065441}"/>
+                <a16:creationId xmlns:a16="http://schemas.microsoft.com/office/drawing/2014/main" id="{8A33E153-AB4C-4361-A836-BCC3E635C093}"/>
               </a:ext>
             </a:extLst>
           </p:cNvPr>
@@ -7313,7 +7313,7 @@
           <p:cNvPr id="11" name="">
             <a:extLst xmlns:a="http://schemas.openxmlformats.org/drawingml/2006/main">
               <a:ext uri="{FF2B5EF4-FFF2-40B4-BE49-F238E27FC236}">
-                <a16:creationId xmlns:a16="http://schemas.microsoft.com/office/drawing/2014/main" id="{B06DF65F-9C33-46E3-AE40-1725170D2A7D}"/>
+                <a16:creationId xmlns:a16="http://schemas.microsoft.com/office/drawing/2014/main" id="{3B1FFC60-BECE-42ED-8FF2-06457A7ADD45}"/>
               </a:ext>
             </a:extLst>
           </p:cNvPr>
@@ -7345,7 +7345,7 @@
           <p:cNvPr id="12" name="">
             <a:extLst xmlns:a="http://schemas.openxmlformats.org/drawingml/2006/main">
               <a:ext uri="{FF2B5EF4-FFF2-40B4-BE49-F238E27FC236}">
-                <a16:creationId xmlns:a16="http://schemas.microsoft.com/office/drawing/2014/main" id="{DB9EDADF-AD8D-4069-8599-09CB85E3E6A5}"/>
+                <a16:creationId xmlns:a16="http://schemas.microsoft.com/office/drawing/2014/main" id="{F59C3909-817D-41D3-9730-84FC715CD69E}"/>
               </a:ext>
             </a:extLst>
           </p:cNvPr>
@@ -7402,7 +7402,7 @@
           <p:cNvPr id="13" name="">
             <a:extLst xmlns:a="http://schemas.openxmlformats.org/drawingml/2006/main">
               <a:ext uri="{FF2B5EF4-FFF2-40B4-BE49-F238E27FC236}">
-                <a16:creationId xmlns:a16="http://schemas.microsoft.com/office/drawing/2014/main" id="{366E6C8C-8ACE-4CD7-9ED5-9C57101EA8B5}"/>
+                <a16:creationId xmlns:a16="http://schemas.microsoft.com/office/drawing/2014/main" id="{18DE731D-FB72-4AFA-910B-5F1D57D36BCB}"/>
               </a:ext>
             </a:extLst>
           </p:cNvPr>
@@ -7459,7 +7459,7 @@
           <p:cNvPr id="14" name="">
             <a:extLst xmlns:a="http://schemas.openxmlformats.org/drawingml/2006/main">
               <a:ext uri="{FF2B5EF4-FFF2-40B4-BE49-F238E27FC236}">
-                <a16:creationId xmlns:a16="http://schemas.microsoft.com/office/drawing/2014/main" id="{EE6E6FD9-A045-45BE-B539-26E0A5BFD5F4}"/>
+                <a16:creationId xmlns:a16="http://schemas.microsoft.com/office/drawing/2014/main" id="{B2213758-F878-4CDC-83BB-B1CCA32190DC}"/>
               </a:ext>
             </a:extLst>
           </p:cNvPr>
@@ -7516,7 +7516,7 @@
           <p:cNvPr id="15" name="">
             <a:extLst xmlns:a="http://schemas.openxmlformats.org/drawingml/2006/main">
               <a:ext uri="{FF2B5EF4-FFF2-40B4-BE49-F238E27FC236}">
-                <a16:creationId xmlns:a16="http://schemas.microsoft.com/office/drawing/2014/main" id="{37E1F293-1C31-4DC3-A407-2AEDC74905FB}"/>
+                <a16:creationId xmlns:a16="http://schemas.microsoft.com/office/drawing/2014/main" id="{964BAB4E-FF2C-4C3B-A1C5-1AE1195131A4}"/>
               </a:ext>
             </a:extLst>
           </p:cNvPr>
@@ -7571,7 +7571,7 @@
     </p:spTree>
     <p:extLst>
       <p:ext uri="{BB962C8B-B14F-4D97-AF65-F5344CB8AC3E}">
-        <p14:creationId xmlns:p14="http://schemas.microsoft.com/office/powerpoint/2010/main" val="1564074585"/>
+        <p14:creationId xmlns:p14="http://schemas.microsoft.com/office/powerpoint/2010/main" val="608766221"/>
       </p:ext>
     </p:extLst>
   </p:cSld>
@@ -7772,7 +7772,7 @@
           <p:cNvPr id="23" name="">
             <a:extLst xmlns:a="http://schemas.openxmlformats.org/drawingml/2006/main">
               <a:ext uri="{FF2B5EF4-FFF2-40B4-BE49-F238E27FC236}">
-                <a16:creationId xmlns:a16="http://schemas.microsoft.com/office/drawing/2014/main" id="{67D029E7-8017-4284-B735-B162CFCB4EDB}"/>
+                <a16:creationId xmlns:a16="http://schemas.microsoft.com/office/drawing/2014/main" id="{9E39FEEB-76DB-4160-8F1F-8145C7C5A46B}"/>
               </a:ext>
             </a:extLst>
           </p:cNvPr>
@@ -7804,7 +7804,7 @@
           <p:cNvPr id="2" name="">
             <a:extLst xmlns:a="http://schemas.openxmlformats.org/drawingml/2006/main">
               <a:ext uri="{FF2B5EF4-FFF2-40B4-BE49-F238E27FC236}">
-                <a16:creationId xmlns:a16="http://schemas.microsoft.com/office/drawing/2014/main" id="{CE980CFA-2091-4085-BB1D-84105303F2B8}"/>
+                <a16:creationId xmlns:a16="http://schemas.microsoft.com/office/drawing/2014/main" id="{FA74D502-402C-43A8-BD55-8094C29D1DC1}"/>
               </a:ext>
             </a:extLst>
           </p:cNvPr>
@@ -7861,7 +7861,7 @@
           <p:cNvPr id="3" name="">
             <a:extLst xmlns:a="http://schemas.openxmlformats.org/drawingml/2006/main">
               <a:ext uri="{FF2B5EF4-FFF2-40B4-BE49-F238E27FC236}">
-                <a16:creationId xmlns:a16="http://schemas.microsoft.com/office/drawing/2014/main" id="{561BBFB0-8992-4711-B9B1-EF8447643F60}"/>
+                <a16:creationId xmlns:a16="http://schemas.microsoft.com/office/drawing/2014/main" id="{BA9E82D5-3554-40AC-BA00-618362FCEBD6}"/>
               </a:ext>
             </a:extLst>
           </p:cNvPr>
@@ -7893,7 +7893,7 @@
           <p:cNvPr id="4" name="">
             <a:extLst xmlns:a="http://schemas.openxmlformats.org/drawingml/2006/main">
               <a:ext uri="{FF2B5EF4-FFF2-40B4-BE49-F238E27FC236}">
-                <a16:creationId xmlns:a16="http://schemas.microsoft.com/office/drawing/2014/main" id="{D5C67E00-B9CB-45AA-9B2C-91DA2C11CF44}"/>
+                <a16:creationId xmlns:a16="http://schemas.microsoft.com/office/drawing/2014/main" id="{AC053A74-225B-4657-9040-E032220D4F8C}"/>
               </a:ext>
             </a:extLst>
           </p:cNvPr>
@@ -7950,7 +7950,7 @@
           <p:cNvPr id="5" name="">
             <a:extLst xmlns:a="http://schemas.openxmlformats.org/drawingml/2006/main">
               <a:ext uri="{FF2B5EF4-FFF2-40B4-BE49-F238E27FC236}">
-                <a16:creationId xmlns:a16="http://schemas.microsoft.com/office/drawing/2014/main" id="{B2E0C114-4097-4609-8FDF-3A935714AE83}"/>
+                <a16:creationId xmlns:a16="http://schemas.microsoft.com/office/drawing/2014/main" id="{0F4DD64C-C02C-4BD4-838B-CB40F8FD7F82}"/>
               </a:ext>
             </a:extLst>
           </p:cNvPr>
@@ -8007,7 +8007,7 @@
           <p:cNvPr id="6" name="">
             <a:extLst xmlns:a="http://schemas.openxmlformats.org/drawingml/2006/main">
               <a:ext uri="{FF2B5EF4-FFF2-40B4-BE49-F238E27FC236}">
-                <a16:creationId xmlns:a16="http://schemas.microsoft.com/office/drawing/2014/main" id="{60A06AC7-2D78-414C-B8B2-D4FFA97161CB}"/>
+                <a16:creationId xmlns:a16="http://schemas.microsoft.com/office/drawing/2014/main" id="{6CE7DF9B-9B3D-43B6-82DD-50ED802EF3EE}"/>
               </a:ext>
             </a:extLst>
           </p:cNvPr>
@@ -8064,7 +8064,7 @@
           <p:cNvPr id="7" name="">
             <a:extLst xmlns:a="http://schemas.openxmlformats.org/drawingml/2006/main">
               <a:ext uri="{FF2B5EF4-FFF2-40B4-BE49-F238E27FC236}">
-                <a16:creationId xmlns:a16="http://schemas.microsoft.com/office/drawing/2014/main" id="{DC1795AE-747E-4ACC-B92F-5E60628C7B07}"/>
+                <a16:creationId xmlns:a16="http://schemas.microsoft.com/office/drawing/2014/main" id="{7EC93856-383D-4DC4-A905-F89118C0D615}"/>
               </a:ext>
             </a:extLst>
           </p:cNvPr>
@@ -8096,7 +8096,7 @@
           <p:cNvPr id="8" name="">
             <a:extLst xmlns:a="http://schemas.openxmlformats.org/drawingml/2006/main">
               <a:ext uri="{FF2B5EF4-FFF2-40B4-BE49-F238E27FC236}">
-                <a16:creationId xmlns:a16="http://schemas.microsoft.com/office/drawing/2014/main" id="{D5134ED5-5C5B-4E3A-852E-46052C6B9D28}"/>
+                <a16:creationId xmlns:a16="http://schemas.microsoft.com/office/drawing/2014/main" id="{E65C8AD3-74D1-4831-A5E6-FC92AB46B4E2}"/>
               </a:ext>
             </a:extLst>
           </p:cNvPr>
@@ -8153,7 +8153,7 @@
           <p:cNvPr id="9" name="">
             <a:extLst xmlns:a="http://schemas.openxmlformats.org/drawingml/2006/main">
               <a:ext uri="{FF2B5EF4-FFF2-40B4-BE49-F238E27FC236}">
-                <a16:creationId xmlns:a16="http://schemas.microsoft.com/office/drawing/2014/main" id="{A2CACFFC-6D74-4C16-B51A-338A128F5562}"/>
+                <a16:creationId xmlns:a16="http://schemas.microsoft.com/office/drawing/2014/main" id="{6B2A7797-0BBF-4312-A990-0BA44E4DD109}"/>
               </a:ext>
             </a:extLst>
           </p:cNvPr>
@@ -8210,19 +8210,19 @@
           <p:cNvPr id="10" name="">
             <a:extLst xmlns:a="http://schemas.openxmlformats.org/drawingml/2006/main">
               <a:ext uri="{FF2B5EF4-FFF2-40B4-BE49-F238E27FC236}">
-                <a16:creationId xmlns:a16="http://schemas.microsoft.com/office/drawing/2014/main" id="{F78DCFAB-93BB-4C1A-8A98-2DBD486F6D27}"/>
-              </a:ext>
-            </a:extLst>
-          </p:cNvPr>
-          <p:cNvSpPr>
-            <a:spLocks xmlns:a="http://schemas.openxmlformats.org/drawingml/2006/main" noGrp="1"/>
-          </p:cNvSpPr>
-          <p:nvPr/>
-        </p:nvSpPr>
-        <p:spPr>
-          <a:xfrm xmlns:a="http://schemas.openxmlformats.org/drawingml/2006/main">
-            <a:off x="914400" y="1257300"/>
-            <a:ext cx="10363200" cy="781050"/>
+                <a16:creationId xmlns:a16="http://schemas.microsoft.com/office/drawing/2014/main" id="{90B92A1A-9FD1-43F7-B17C-D16406235C42}"/>
+              </a:ext>
+            </a:extLst>
+          </p:cNvPr>
+          <p:cNvSpPr>
+            <a:spLocks xmlns:a="http://schemas.openxmlformats.org/drawingml/2006/main" noGrp="1"/>
+          </p:cNvSpPr>
+          <p:nvPr/>
+        </p:nvSpPr>
+        <p:spPr>
+          <a:xfrm xmlns:a="http://schemas.openxmlformats.org/drawingml/2006/main">
+            <a:off x="857250" y="1219200"/>
+            <a:ext cx="10477500" cy="742950"/>
           </a:xfrm>
           <a:prstGeom xmlns:a="http://schemas.openxmlformats.org/drawingml/2006/main" prst="rect">
             <a:avLst/>
@@ -8239,7 +8239,7 @@
           <a:lstStyle xmlns:a="http://schemas.openxmlformats.org/drawingml/2006/main"/>
           <a:p xmlns:a="http://schemas.openxmlformats.org/drawingml/2006/main">
             <a:pPr algn="ctr">
-              <a:defRPr sz="2175" b="1">
+              <a:defRPr sz="2100" b="1">
                 <a:solidFill>
                   <a:srgbClr val="17253A"/>
                 </a:solidFill>
@@ -8249,7 +8249,7 @@
               </a:defRPr>
             </a:pPr>
             <a:r>
-              <a:rPr sz="2175" b="1">
+              <a:rPr sz="2100" b="1">
                 <a:solidFill>
                   <a:srgbClr val="17253A"/>
                 </a:solidFill>
@@ -8267,28 +8267,30 @@
           <p:cNvPr id="11" name="">
             <a:extLst xmlns:a="http://schemas.openxmlformats.org/drawingml/2006/main">
               <a:ext uri="{FF2B5EF4-FFF2-40B4-BE49-F238E27FC236}">
-                <a16:creationId xmlns:a16="http://schemas.microsoft.com/office/drawing/2014/main" id="{E86BB8A0-67AD-4AF2-B64F-F60528901862}"/>
-              </a:ext>
-            </a:extLst>
-          </p:cNvPr>
-          <p:cNvSpPr>
-            <a:spLocks xmlns:a="http://schemas.openxmlformats.org/drawingml/2006/main" noGrp="1"/>
-          </p:cNvSpPr>
-          <p:nvPr/>
-        </p:nvSpPr>
-        <p:spPr>
-          <a:xfrm xmlns:a="http://schemas.openxmlformats.org/drawingml/2006/main">
-            <a:off x="1000125" y="2247900"/>
-            <a:ext cx="476250" cy="476250"/>
-          </a:xfrm>
-          <a:prstGeom xmlns:a="http://schemas.openxmlformats.org/drawingml/2006/main" prst="ellipse">
+                <a16:creationId xmlns:a16="http://schemas.microsoft.com/office/drawing/2014/main" id="{1A558C52-5D20-4FAA-A9ED-E85D2EB742B6}"/>
+              </a:ext>
+            </a:extLst>
+          </p:cNvPr>
+          <p:cNvSpPr>
+            <a:spLocks xmlns:a="http://schemas.openxmlformats.org/drawingml/2006/main" noGrp="1"/>
+          </p:cNvSpPr>
+          <p:nvPr/>
+        </p:nvSpPr>
+        <p:spPr>
+          <a:xfrm xmlns:a="http://schemas.openxmlformats.org/drawingml/2006/main">
+            <a:off x="971550" y="2124075"/>
+            <a:ext cx="38100" cy="3524250"/>
+          </a:xfrm>
+          <a:prstGeom xmlns:a="http://schemas.openxmlformats.org/drawingml/2006/main" prst="rect">
             <a:avLst/>
           </a:prstGeom>
           <a:solidFill xmlns:a="http://schemas.openxmlformats.org/drawingml/2006/main">
-            <a:srgbClr val="18324A"/>
+            <a:srgbClr val="2C6E73"/>
           </a:solidFill>
           <a:ln xmlns:a="http://schemas.openxmlformats.org/drawingml/2006/main" w="0">
-            <a:noFill/>
+            <a:solidFill>
+              <a:srgbClr val="2C6E73"/>
+            </a:solidFill>
           </a:ln>
         </p:spPr>
       </p:sp>
@@ -8297,19 +8299,19 @@
           <p:cNvPr id="12" name="">
             <a:extLst xmlns:a="http://schemas.openxmlformats.org/drawingml/2006/main">
               <a:ext uri="{FF2B5EF4-FFF2-40B4-BE49-F238E27FC236}">
-                <a16:creationId xmlns:a16="http://schemas.microsoft.com/office/drawing/2014/main" id="{95403FF3-ACD9-4BD1-86BC-41A10FD3F3CF}"/>
-              </a:ext>
-            </a:extLst>
-          </p:cNvPr>
-          <p:cNvSpPr>
-            <a:spLocks xmlns:a="http://schemas.openxmlformats.org/drawingml/2006/main" noGrp="1"/>
-          </p:cNvSpPr>
-          <p:nvPr/>
-        </p:nvSpPr>
-        <p:spPr>
-          <a:xfrm xmlns:a="http://schemas.openxmlformats.org/drawingml/2006/main">
-            <a:off x="1000125" y="2276475"/>
-            <a:ext cx="476250" cy="419100"/>
+                <a16:creationId xmlns:a16="http://schemas.microsoft.com/office/drawing/2014/main" id="{19512B29-2633-4F31-95B3-7B43CD0030A8}"/>
+              </a:ext>
+            </a:extLst>
+          </p:cNvPr>
+          <p:cNvSpPr>
+            <a:spLocks xmlns:a="http://schemas.openxmlformats.org/drawingml/2006/main" noGrp="1"/>
+          </p:cNvSpPr>
+          <p:nvPr/>
+        </p:nvSpPr>
+        <p:spPr>
+          <a:xfrm xmlns:a="http://schemas.openxmlformats.org/drawingml/2006/main">
+            <a:off x="1162050" y="2200275"/>
+            <a:ext cx="400050" cy="400050"/>
           </a:xfrm>
           <a:prstGeom xmlns:a="http://schemas.openxmlformats.org/drawingml/2006/main" prst="rect">
             <a:avLst/>
@@ -8326,9 +8328,9 @@
           <a:lstStyle xmlns:a="http://schemas.openxmlformats.org/drawingml/2006/main"/>
           <a:p xmlns:a="http://schemas.openxmlformats.org/drawingml/2006/main">
             <a:pPr algn="ctr">
-              <a:defRPr sz="1350" b="1">
-                <a:solidFill>
-                  <a:srgbClr val="FFFFFF"/>
+              <a:defRPr sz="1125" b="1">
+                <a:solidFill>
+                  <a:srgbClr val="2C6E73"/>
                 </a:solidFill>
                 <a:latin typeface="Arial"/>
                 <a:ea typeface="Arial"/>
@@ -8336,9 +8338,9 @@
               </a:defRPr>
             </a:pPr>
             <a:r>
-              <a:rPr sz="1350" b="1">
-                <a:solidFill>
-                  <a:srgbClr val="FFFFFF"/>
+              <a:rPr sz="1125" b="1">
+                <a:solidFill>
+                  <a:srgbClr val="2C6E73"/>
                 </a:solidFill>
                 <a:latin typeface="Arial"/>
                 <a:ea typeface="Arial"/>
@@ -8354,19 +8356,19 @@
           <p:cNvPr id="13" name="">
             <a:extLst xmlns:a="http://schemas.openxmlformats.org/drawingml/2006/main">
               <a:ext uri="{FF2B5EF4-FFF2-40B4-BE49-F238E27FC236}">
-                <a16:creationId xmlns:a16="http://schemas.microsoft.com/office/drawing/2014/main" id="{7765AB04-58B9-4B7E-9063-2CDCC5898649}"/>
-              </a:ext>
-            </a:extLst>
-          </p:cNvPr>
-          <p:cNvSpPr>
-            <a:spLocks xmlns:a="http://schemas.openxmlformats.org/drawingml/2006/main" noGrp="1"/>
-          </p:cNvSpPr>
-          <p:nvPr/>
-        </p:nvSpPr>
-        <p:spPr>
-          <a:xfrm xmlns:a="http://schemas.openxmlformats.org/drawingml/2006/main">
-            <a:off x="1714500" y="2181225"/>
-            <a:ext cx="9429750" cy="609600"/>
+                <a16:creationId xmlns:a16="http://schemas.microsoft.com/office/drawing/2014/main" id="{E2829532-E382-42B2-8FB0-12E88E27F0A6}"/>
+              </a:ext>
+            </a:extLst>
+          </p:cNvPr>
+          <p:cNvSpPr>
+            <a:spLocks xmlns:a="http://schemas.openxmlformats.org/drawingml/2006/main" noGrp="1"/>
+          </p:cNvSpPr>
+          <p:nvPr/>
+        </p:nvSpPr>
+        <p:spPr>
+          <a:xfrm xmlns:a="http://schemas.openxmlformats.org/drawingml/2006/main">
+            <a:off x="1714500" y="2114550"/>
+            <a:ext cx="9525000" cy="809625"/>
           </a:xfrm>
           <a:prstGeom xmlns:a="http://schemas.openxmlformats.org/drawingml/2006/main" prst="rect">
             <a:avLst/>
@@ -8383,7 +8385,7 @@
           <a:lstStyle xmlns:a="http://schemas.openxmlformats.org/drawingml/2006/main"/>
           <a:p xmlns:a="http://schemas.openxmlformats.org/drawingml/2006/main">
             <a:pPr algn="l">
-              <a:defRPr sz="1500" b="0">
+              <a:defRPr sz="1725" b="0">
                 <a:solidFill>
                   <a:srgbClr val="17253A"/>
                 </a:solidFill>
@@ -8393,7 +8395,7 @@
               </a:defRPr>
             </a:pPr>
             <a:r>
-              <a:rPr sz="1500" b="0">
+              <a:rPr sz="1725" b="0">
                 <a:solidFill>
                   <a:srgbClr val="17253A"/>
                 </a:solidFill>
@@ -8401,7 +8403,7 @@
                 <a:ea typeface="Arial"/>
                 <a:cs typeface="Arial"/>
               </a:rPr>
-              <a:t>Identify the structure: Mark known properties and angle facts on the diagram.</a:t>
+              <a:t>Angles around a point total 360°</a:t>
             </a:r>
           </a:p>
         </p:txBody>
@@ -8411,28 +8413,30 @@
           <p:cNvPr id="14" name="">
             <a:extLst xmlns:a="http://schemas.openxmlformats.org/drawingml/2006/main">
               <a:ext uri="{FF2B5EF4-FFF2-40B4-BE49-F238E27FC236}">
-                <a16:creationId xmlns:a16="http://schemas.microsoft.com/office/drawing/2014/main" id="{1AA71C4E-EA78-4AF3-A5A5-83596C1CA203}"/>
-              </a:ext>
-            </a:extLst>
-          </p:cNvPr>
-          <p:cNvSpPr>
-            <a:spLocks xmlns:a="http://schemas.openxmlformats.org/drawingml/2006/main" noGrp="1"/>
-          </p:cNvSpPr>
-          <p:nvPr/>
-        </p:nvSpPr>
-        <p:spPr>
-          <a:xfrm xmlns:a="http://schemas.openxmlformats.org/drawingml/2006/main">
-            <a:off x="1000125" y="2990850"/>
-            <a:ext cx="476250" cy="476250"/>
-          </a:xfrm>
-          <a:prstGeom xmlns:a="http://schemas.openxmlformats.org/drawingml/2006/main" prst="ellipse">
+                <a16:creationId xmlns:a16="http://schemas.microsoft.com/office/drawing/2014/main" id="{33E119C9-9411-4AF6-B6C7-81C7F0E9D3B1}"/>
+              </a:ext>
+            </a:extLst>
+          </p:cNvPr>
+          <p:cNvSpPr>
+            <a:spLocks xmlns:a="http://schemas.openxmlformats.org/drawingml/2006/main" noGrp="1"/>
+          </p:cNvSpPr>
+          <p:nvPr/>
+        </p:nvSpPr>
+        <p:spPr>
+          <a:xfrm xmlns:a="http://schemas.openxmlformats.org/drawingml/2006/main">
+            <a:off x="1714500" y="2943225"/>
+            <a:ext cx="9334500" cy="9525"/>
+          </a:xfrm>
+          <a:prstGeom xmlns:a="http://schemas.openxmlformats.org/drawingml/2006/main" prst="rect">
             <a:avLst/>
           </a:prstGeom>
           <a:solidFill xmlns:a="http://schemas.openxmlformats.org/drawingml/2006/main">
-            <a:srgbClr val="2C6E73"/>
+            <a:srgbClr val="D9E0E6"/>
           </a:solidFill>
           <a:ln xmlns:a="http://schemas.openxmlformats.org/drawingml/2006/main" w="0">
-            <a:noFill/>
+            <a:solidFill>
+              <a:srgbClr val="D9E0E6"/>
+            </a:solidFill>
           </a:ln>
         </p:spPr>
       </p:sp>
@@ -8441,19 +8445,19 @@
           <p:cNvPr id="15" name="">
             <a:extLst xmlns:a="http://schemas.openxmlformats.org/drawingml/2006/main">
               <a:ext uri="{FF2B5EF4-FFF2-40B4-BE49-F238E27FC236}">
-                <a16:creationId xmlns:a16="http://schemas.microsoft.com/office/drawing/2014/main" id="{D5E11E8D-C5EE-4382-92E8-A0BCB583A24F}"/>
-              </a:ext>
-            </a:extLst>
-          </p:cNvPr>
-          <p:cNvSpPr>
-            <a:spLocks xmlns:a="http://schemas.openxmlformats.org/drawingml/2006/main" noGrp="1"/>
-          </p:cNvSpPr>
-          <p:nvPr/>
-        </p:nvSpPr>
-        <p:spPr>
-          <a:xfrm xmlns:a="http://schemas.openxmlformats.org/drawingml/2006/main">
-            <a:off x="1000125" y="3019425"/>
-            <a:ext cx="476250" cy="419100"/>
+                <a16:creationId xmlns:a16="http://schemas.microsoft.com/office/drawing/2014/main" id="{F3F216B1-30F9-4B08-AFE7-A47C33F896AE}"/>
+              </a:ext>
+            </a:extLst>
+          </p:cNvPr>
+          <p:cNvSpPr>
+            <a:spLocks xmlns:a="http://schemas.openxmlformats.org/drawingml/2006/main" noGrp="1"/>
+          </p:cNvSpPr>
+          <p:nvPr/>
+        </p:nvSpPr>
+        <p:spPr>
+          <a:xfrm xmlns:a="http://schemas.openxmlformats.org/drawingml/2006/main">
+            <a:off x="1162050" y="3076575"/>
+            <a:ext cx="400050" cy="400050"/>
           </a:xfrm>
           <a:prstGeom xmlns:a="http://schemas.openxmlformats.org/drawingml/2006/main" prst="rect">
             <a:avLst/>
@@ -8470,9 +8474,9 @@
           <a:lstStyle xmlns:a="http://schemas.openxmlformats.org/drawingml/2006/main"/>
           <a:p xmlns:a="http://schemas.openxmlformats.org/drawingml/2006/main">
             <a:pPr algn="ctr">
-              <a:defRPr sz="1350" b="1">
-                <a:solidFill>
-                  <a:srgbClr val="FFFFFF"/>
+              <a:defRPr sz="1125" b="1">
+                <a:solidFill>
+                  <a:srgbClr val="2C6E73"/>
                 </a:solidFill>
                 <a:latin typeface="Arial"/>
                 <a:ea typeface="Arial"/>
@@ -8480,9 +8484,9 @@
               </a:defRPr>
             </a:pPr>
             <a:r>
-              <a:rPr sz="1350" b="1">
-                <a:solidFill>
-                  <a:srgbClr val="FFFFFF"/>
+              <a:rPr sz="1125" b="1">
+                <a:solidFill>
+                  <a:srgbClr val="2C6E73"/>
                 </a:solidFill>
                 <a:latin typeface="Arial"/>
                 <a:ea typeface="Arial"/>
@@ -8498,19 +8502,19 @@
           <p:cNvPr id="16" name="">
             <a:extLst xmlns:a="http://schemas.openxmlformats.org/drawingml/2006/main">
               <a:ext uri="{FF2B5EF4-FFF2-40B4-BE49-F238E27FC236}">
-                <a16:creationId xmlns:a16="http://schemas.microsoft.com/office/drawing/2014/main" id="{2D376923-67B3-4563-B2D9-9A7EF5C9CFFE}"/>
-              </a:ext>
-            </a:extLst>
-          </p:cNvPr>
-          <p:cNvSpPr>
-            <a:spLocks xmlns:a="http://schemas.openxmlformats.org/drawingml/2006/main" noGrp="1"/>
-          </p:cNvSpPr>
-          <p:nvPr/>
-        </p:nvSpPr>
-        <p:spPr>
-          <a:xfrm xmlns:a="http://schemas.openxmlformats.org/drawingml/2006/main">
-            <a:off x="1714500" y="2924175"/>
-            <a:ext cx="9429750" cy="609600"/>
+                <a16:creationId xmlns:a16="http://schemas.microsoft.com/office/drawing/2014/main" id="{0802A13B-E08F-49CE-BB63-4AD4DE1EEFF2}"/>
+              </a:ext>
+            </a:extLst>
+          </p:cNvPr>
+          <p:cNvSpPr>
+            <a:spLocks xmlns:a="http://schemas.openxmlformats.org/drawingml/2006/main" noGrp="1"/>
+          </p:cNvSpPr>
+          <p:nvPr/>
+        </p:nvSpPr>
+        <p:spPr>
+          <a:xfrm xmlns:a="http://schemas.openxmlformats.org/drawingml/2006/main">
+            <a:off x="1714500" y="2990850"/>
+            <a:ext cx="9525000" cy="809625"/>
           </a:xfrm>
           <a:prstGeom xmlns:a="http://schemas.openxmlformats.org/drawingml/2006/main" prst="rect">
             <a:avLst/>
@@ -8527,7 +8531,7 @@
           <a:lstStyle xmlns:a="http://schemas.openxmlformats.org/drawingml/2006/main"/>
           <a:p xmlns:a="http://schemas.openxmlformats.org/drawingml/2006/main">
             <a:pPr algn="l">
-              <a:defRPr sz="1500" b="0">
+              <a:defRPr sz="1725" b="0">
                 <a:solidFill>
                   <a:srgbClr val="17253A"/>
                 </a:solidFill>
@@ -8537,7 +8541,7 @@
               </a:defRPr>
             </a:pPr>
             <a:r>
-              <a:rPr sz="1500" b="0">
+              <a:rPr sz="1725" b="0">
                 <a:solidFill>
                   <a:srgbClr val="17253A"/>
                 </a:solidFill>
@@ -8545,7 +8549,7 @@
                 <a:ea typeface="Arial"/>
                 <a:cs typeface="Arial"/>
               </a:rPr>
-              <a:t>Set up the method: Form a calculation using angles on a line, around a point or inside a shape.</a:t>
+              <a:t>Known angles: 85° + 140° = 225°</a:t>
             </a:r>
           </a:p>
         </p:txBody>
@@ -8555,28 +8559,30 @@
           <p:cNvPr id="17" name="">
             <a:extLst xmlns:a="http://schemas.openxmlformats.org/drawingml/2006/main">
               <a:ext uri="{FF2B5EF4-FFF2-40B4-BE49-F238E27FC236}">
-                <a16:creationId xmlns:a16="http://schemas.microsoft.com/office/drawing/2014/main" id="{CBE0895A-EB2A-42C6-BC66-9894C777E2A8}"/>
-              </a:ext>
-            </a:extLst>
-          </p:cNvPr>
-          <p:cNvSpPr>
-            <a:spLocks xmlns:a="http://schemas.openxmlformats.org/drawingml/2006/main" noGrp="1"/>
-          </p:cNvSpPr>
-          <p:nvPr/>
-        </p:nvSpPr>
-        <p:spPr>
-          <a:xfrm xmlns:a="http://schemas.openxmlformats.org/drawingml/2006/main">
-            <a:off x="1000125" y="3733800"/>
-            <a:ext cx="476250" cy="476250"/>
-          </a:xfrm>
-          <a:prstGeom xmlns:a="http://schemas.openxmlformats.org/drawingml/2006/main" prst="ellipse">
+                <a16:creationId xmlns:a16="http://schemas.microsoft.com/office/drawing/2014/main" id="{D54DEC07-BCC3-495F-89C0-459483DAF5AF}"/>
+              </a:ext>
+            </a:extLst>
+          </p:cNvPr>
+          <p:cNvSpPr>
+            <a:spLocks xmlns:a="http://schemas.openxmlformats.org/drawingml/2006/main" noGrp="1"/>
+          </p:cNvSpPr>
+          <p:nvPr/>
+        </p:nvSpPr>
+        <p:spPr>
+          <a:xfrm xmlns:a="http://schemas.openxmlformats.org/drawingml/2006/main">
+            <a:off x="1714500" y="3819525"/>
+            <a:ext cx="9334500" cy="9525"/>
+          </a:xfrm>
+          <a:prstGeom xmlns:a="http://schemas.openxmlformats.org/drawingml/2006/main" prst="rect">
             <a:avLst/>
           </a:prstGeom>
           <a:solidFill xmlns:a="http://schemas.openxmlformats.org/drawingml/2006/main">
-            <a:srgbClr val="2C6E73"/>
+            <a:srgbClr val="D9E0E6"/>
           </a:solidFill>
           <a:ln xmlns:a="http://schemas.openxmlformats.org/drawingml/2006/main" w="0">
-            <a:noFill/>
+            <a:solidFill>
+              <a:srgbClr val="D9E0E6"/>
+            </a:solidFill>
           </a:ln>
         </p:spPr>
       </p:sp>
@@ -8585,19 +8591,19 @@
           <p:cNvPr id="18" name="">
             <a:extLst xmlns:a="http://schemas.openxmlformats.org/drawingml/2006/main">
               <a:ext uri="{FF2B5EF4-FFF2-40B4-BE49-F238E27FC236}">
-                <a16:creationId xmlns:a16="http://schemas.microsoft.com/office/drawing/2014/main" id="{060326B2-342D-4BC8-A89E-D1AF65184173}"/>
-              </a:ext>
-            </a:extLst>
-          </p:cNvPr>
-          <p:cNvSpPr>
-            <a:spLocks xmlns:a="http://schemas.openxmlformats.org/drawingml/2006/main" noGrp="1"/>
-          </p:cNvSpPr>
-          <p:nvPr/>
-        </p:nvSpPr>
-        <p:spPr>
-          <a:xfrm xmlns:a="http://schemas.openxmlformats.org/drawingml/2006/main">
-            <a:off x="1000125" y="3762375"/>
-            <a:ext cx="476250" cy="419100"/>
+                <a16:creationId xmlns:a16="http://schemas.microsoft.com/office/drawing/2014/main" id="{EC1FA0E7-85DB-428D-8579-164815F48297}"/>
+              </a:ext>
+            </a:extLst>
+          </p:cNvPr>
+          <p:cNvSpPr>
+            <a:spLocks xmlns:a="http://schemas.openxmlformats.org/drawingml/2006/main" noGrp="1"/>
+          </p:cNvSpPr>
+          <p:nvPr/>
+        </p:nvSpPr>
+        <p:spPr>
+          <a:xfrm xmlns:a="http://schemas.openxmlformats.org/drawingml/2006/main">
+            <a:off x="1162050" y="3952875"/>
+            <a:ext cx="400050" cy="400050"/>
           </a:xfrm>
           <a:prstGeom xmlns:a="http://schemas.openxmlformats.org/drawingml/2006/main" prst="rect">
             <a:avLst/>
@@ -8614,9 +8620,9 @@
           <a:lstStyle xmlns:a="http://schemas.openxmlformats.org/drawingml/2006/main"/>
           <a:p xmlns:a="http://schemas.openxmlformats.org/drawingml/2006/main">
             <a:pPr algn="ctr">
-              <a:defRPr sz="1350" b="1">
-                <a:solidFill>
-                  <a:srgbClr val="FFFFFF"/>
+              <a:defRPr sz="1125" b="1">
+                <a:solidFill>
+                  <a:srgbClr val="2C6E73"/>
                 </a:solidFill>
                 <a:latin typeface="Arial"/>
                 <a:ea typeface="Arial"/>
@@ -8624,9 +8630,9 @@
               </a:defRPr>
             </a:pPr>
             <a:r>
-              <a:rPr sz="1350" b="1">
-                <a:solidFill>
-                  <a:srgbClr val="FFFFFF"/>
+              <a:rPr sz="1125" b="1">
+                <a:solidFill>
+                  <a:srgbClr val="2C6E73"/>
                 </a:solidFill>
                 <a:latin typeface="Arial"/>
                 <a:ea typeface="Arial"/>
@@ -8642,19 +8648,19 @@
           <p:cNvPr id="19" name="">
             <a:extLst xmlns:a="http://schemas.openxmlformats.org/drawingml/2006/main">
               <a:ext uri="{FF2B5EF4-FFF2-40B4-BE49-F238E27FC236}">
-                <a16:creationId xmlns:a16="http://schemas.microsoft.com/office/drawing/2014/main" id="{366A44DF-F99D-421C-8AE4-AEBB127B204F}"/>
-              </a:ext>
-            </a:extLst>
-          </p:cNvPr>
-          <p:cNvSpPr>
-            <a:spLocks xmlns:a="http://schemas.openxmlformats.org/drawingml/2006/main" noGrp="1"/>
-          </p:cNvSpPr>
-          <p:nvPr/>
-        </p:nvSpPr>
-        <p:spPr>
-          <a:xfrm xmlns:a="http://schemas.openxmlformats.org/drawingml/2006/main">
-            <a:off x="1714500" y="3667125"/>
-            <a:ext cx="9429750" cy="609600"/>
+                <a16:creationId xmlns:a16="http://schemas.microsoft.com/office/drawing/2014/main" id="{CAF3ACC5-674B-4D79-8C13-89DD46B449A3}"/>
+              </a:ext>
+            </a:extLst>
+          </p:cNvPr>
+          <p:cNvSpPr>
+            <a:spLocks xmlns:a="http://schemas.openxmlformats.org/drawingml/2006/main" noGrp="1"/>
+          </p:cNvSpPr>
+          <p:nvPr/>
+        </p:nvSpPr>
+        <p:spPr>
+          <a:xfrm xmlns:a="http://schemas.openxmlformats.org/drawingml/2006/main">
+            <a:off x="1714500" y="3867150"/>
+            <a:ext cx="9525000" cy="809625"/>
           </a:xfrm>
           <a:prstGeom xmlns:a="http://schemas.openxmlformats.org/drawingml/2006/main" prst="rect">
             <a:avLst/>
@@ -8671,7 +8677,7 @@
           <a:lstStyle xmlns:a="http://schemas.openxmlformats.org/drawingml/2006/main"/>
           <a:p xmlns:a="http://schemas.openxmlformats.org/drawingml/2006/main">
             <a:pPr algn="l">
-              <a:defRPr sz="1500" b="0">
+              <a:defRPr sz="1725" b="0">
                 <a:solidFill>
                   <a:srgbClr val="17253A"/>
                 </a:solidFill>
@@ -8681,7 +8687,7 @@
               </a:defRPr>
             </a:pPr>
             <a:r>
-              <a:rPr sz="1500" b="0">
+              <a:rPr sz="1725" b="0">
                 <a:solidFill>
                   <a:srgbClr val="17253A"/>
                 </a:solidFill>
@@ -8689,7 +8695,7 @@
                 <a:ea typeface="Arial"/>
                 <a:cs typeface="Arial"/>
               </a:rPr>
-              <a:t>Complete the calculation: 135 degrees.</a:t>
+              <a:t>x = 360° - 225°</a:t>
             </a:r>
           </a:p>
         </p:txBody>
@@ -8699,28 +8705,30 @@
           <p:cNvPr id="20" name="">
             <a:extLst xmlns:a="http://schemas.openxmlformats.org/drawingml/2006/main">
               <a:ext uri="{FF2B5EF4-FFF2-40B4-BE49-F238E27FC236}">
-                <a16:creationId xmlns:a16="http://schemas.microsoft.com/office/drawing/2014/main" id="{64B0A567-43ED-4E8A-8FCB-B426D16FA925}"/>
-              </a:ext>
-            </a:extLst>
-          </p:cNvPr>
-          <p:cNvSpPr>
-            <a:spLocks xmlns:a="http://schemas.openxmlformats.org/drawingml/2006/main" noGrp="1"/>
-          </p:cNvSpPr>
-          <p:nvPr/>
-        </p:nvSpPr>
-        <p:spPr>
-          <a:xfrm xmlns:a="http://schemas.openxmlformats.org/drawingml/2006/main">
-            <a:off x="1000125" y="4476750"/>
-            <a:ext cx="476250" cy="476250"/>
-          </a:xfrm>
-          <a:prstGeom xmlns:a="http://schemas.openxmlformats.org/drawingml/2006/main" prst="ellipse">
+                <a16:creationId xmlns:a16="http://schemas.microsoft.com/office/drawing/2014/main" id="{05CAD1A8-DAC1-4B8D-B7BE-B12888D517F8}"/>
+              </a:ext>
+            </a:extLst>
+          </p:cNvPr>
+          <p:cNvSpPr>
+            <a:spLocks xmlns:a="http://schemas.openxmlformats.org/drawingml/2006/main" noGrp="1"/>
+          </p:cNvSpPr>
+          <p:nvPr/>
+        </p:nvSpPr>
+        <p:spPr>
+          <a:xfrm xmlns:a="http://schemas.openxmlformats.org/drawingml/2006/main">
+            <a:off x="1714500" y="4695825"/>
+            <a:ext cx="9334500" cy="9525"/>
+          </a:xfrm>
+          <a:prstGeom xmlns:a="http://schemas.openxmlformats.org/drawingml/2006/main" prst="rect">
             <a:avLst/>
           </a:prstGeom>
           <a:solidFill xmlns:a="http://schemas.openxmlformats.org/drawingml/2006/main">
-            <a:srgbClr val="2C6E73"/>
+            <a:srgbClr val="D9E0E6"/>
           </a:solidFill>
           <a:ln xmlns:a="http://schemas.openxmlformats.org/drawingml/2006/main" w="0">
-            <a:noFill/>
+            <a:solidFill>
+              <a:srgbClr val="D9E0E6"/>
+            </a:solidFill>
           </a:ln>
         </p:spPr>
       </p:sp>
@@ -8729,19 +8737,19 @@
           <p:cNvPr id="21" name="">
             <a:extLst xmlns:a="http://schemas.openxmlformats.org/drawingml/2006/main">
               <a:ext uri="{FF2B5EF4-FFF2-40B4-BE49-F238E27FC236}">
-                <a16:creationId xmlns:a16="http://schemas.microsoft.com/office/drawing/2014/main" id="{B58D2FB9-1CC1-438C-9C0A-378ABA2551DF}"/>
-              </a:ext>
-            </a:extLst>
-          </p:cNvPr>
-          <p:cNvSpPr>
-            <a:spLocks xmlns:a="http://schemas.openxmlformats.org/drawingml/2006/main" noGrp="1"/>
-          </p:cNvSpPr>
-          <p:nvPr/>
-        </p:nvSpPr>
-        <p:spPr>
-          <a:xfrm xmlns:a="http://schemas.openxmlformats.org/drawingml/2006/main">
-            <a:off x="1000125" y="4505325"/>
-            <a:ext cx="476250" cy="419100"/>
+                <a16:creationId xmlns:a16="http://schemas.microsoft.com/office/drawing/2014/main" id="{D7CE2472-766E-4EB0-96AA-DF06FC17BF5F}"/>
+              </a:ext>
+            </a:extLst>
+          </p:cNvPr>
+          <p:cNvSpPr>
+            <a:spLocks xmlns:a="http://schemas.openxmlformats.org/drawingml/2006/main" noGrp="1"/>
+          </p:cNvSpPr>
+          <p:nvPr/>
+        </p:nvSpPr>
+        <p:spPr>
+          <a:xfrm xmlns:a="http://schemas.openxmlformats.org/drawingml/2006/main">
+            <a:off x="1162050" y="4829175"/>
+            <a:ext cx="400050" cy="400050"/>
           </a:xfrm>
           <a:prstGeom xmlns:a="http://schemas.openxmlformats.org/drawingml/2006/main" prst="rect">
             <a:avLst/>
@@ -8758,9 +8766,9 @@
           <a:lstStyle xmlns:a="http://schemas.openxmlformats.org/drawingml/2006/main"/>
           <a:p xmlns:a="http://schemas.openxmlformats.org/drawingml/2006/main">
             <a:pPr algn="ctr">
-              <a:defRPr sz="1350" b="1">
-                <a:solidFill>
-                  <a:srgbClr val="FFFFFF"/>
+              <a:defRPr sz="1125" b="1">
+                <a:solidFill>
+                  <a:srgbClr val="2F785D"/>
                 </a:solidFill>
                 <a:latin typeface="Arial"/>
                 <a:ea typeface="Arial"/>
@@ -8768,9 +8776,9 @@
               </a:defRPr>
             </a:pPr>
             <a:r>
-              <a:rPr sz="1350" b="1">
-                <a:solidFill>
-                  <a:srgbClr val="FFFFFF"/>
+              <a:rPr sz="1125" b="1">
+                <a:solidFill>
+                  <a:srgbClr val="2F785D"/>
                 </a:solidFill>
                 <a:latin typeface="Arial"/>
                 <a:ea typeface="Arial"/>
@@ -8786,19 +8794,19 @@
           <p:cNvPr id="22" name="">
             <a:extLst xmlns:a="http://schemas.openxmlformats.org/drawingml/2006/main">
               <a:ext uri="{FF2B5EF4-FFF2-40B4-BE49-F238E27FC236}">
-                <a16:creationId xmlns:a16="http://schemas.microsoft.com/office/drawing/2014/main" id="{40D8BEF4-E994-4D5E-9E44-5E6720D5A4A3}"/>
-              </a:ext>
-            </a:extLst>
-          </p:cNvPr>
-          <p:cNvSpPr>
-            <a:spLocks xmlns:a="http://schemas.openxmlformats.org/drawingml/2006/main" noGrp="1"/>
-          </p:cNvSpPr>
-          <p:nvPr/>
-        </p:nvSpPr>
-        <p:spPr>
-          <a:xfrm xmlns:a="http://schemas.openxmlformats.org/drawingml/2006/main">
-            <a:off x="1714500" y="4410075"/>
-            <a:ext cx="9429750" cy="609600"/>
+                <a16:creationId xmlns:a16="http://schemas.microsoft.com/office/drawing/2014/main" id="{68902645-6DC9-4A71-BA7C-4FA75D280234}"/>
+              </a:ext>
+            </a:extLst>
+          </p:cNvPr>
+          <p:cNvSpPr>
+            <a:spLocks xmlns:a="http://schemas.openxmlformats.org/drawingml/2006/main" noGrp="1"/>
+          </p:cNvSpPr>
+          <p:nvPr/>
+        </p:nvSpPr>
+        <p:spPr>
+          <a:xfrm xmlns:a="http://schemas.openxmlformats.org/drawingml/2006/main">
+            <a:off x="1714500" y="4743450"/>
+            <a:ext cx="9525000" cy="809625"/>
           </a:xfrm>
           <a:prstGeom xmlns:a="http://schemas.openxmlformats.org/drawingml/2006/main" prst="rect">
             <a:avLst/>
@@ -8815,7 +8823,7 @@
           <a:lstStyle xmlns:a="http://schemas.openxmlformats.org/drawingml/2006/main"/>
           <a:p xmlns:a="http://schemas.openxmlformats.org/drawingml/2006/main">
             <a:pPr algn="l">
-              <a:defRPr sz="1500" b="1">
+              <a:defRPr sz="1725" b="1">
                 <a:solidFill>
                   <a:srgbClr val="2F785D"/>
                 </a:solidFill>
@@ -8825,7 +8833,7 @@
               </a:defRPr>
             </a:pPr>
             <a:r>
-              <a:rPr sz="1500" b="1">
+              <a:rPr sz="1725" b="1">
                 <a:solidFill>
                   <a:srgbClr val="2F785D"/>
                 </a:solidFill>
@@ -8833,7 +8841,7 @@
                 <a:ea typeface="Arial"/>
                 <a:cs typeface="Arial"/>
               </a:rPr>
-              <a:t>Check the result: Check the angle size and label it with degrees.</a:t>
+              <a:t>x = 135°</a:t>
             </a:r>
           </a:p>
         </p:txBody>
@@ -8841,7 +8849,7 @@
     </p:spTree>
     <p:extLst>
       <p:ext uri="{BB962C8B-B14F-4D97-AF65-F5344CB8AC3E}">
-        <p14:creationId xmlns:p14="http://schemas.microsoft.com/office/powerpoint/2010/main" val="1802378389"/>
+        <p14:creationId xmlns:p14="http://schemas.microsoft.com/office/powerpoint/2010/main" val="653139711"/>
       </p:ext>
     </p:extLst>
   </p:cSld>
@@ -9134,7 +9142,7 @@
           <p:cNvPr id="15" name="">
             <a:extLst xmlns:a="http://schemas.openxmlformats.org/drawingml/2006/main">
               <a:ext uri="{FF2B5EF4-FFF2-40B4-BE49-F238E27FC236}">
-                <a16:creationId xmlns:a16="http://schemas.microsoft.com/office/drawing/2014/main" id="{43907FAE-6A31-4490-A56B-2F71CE84E7B4}"/>
+                <a16:creationId xmlns:a16="http://schemas.microsoft.com/office/drawing/2014/main" id="{F1508E49-E52A-4498-96AF-DAFE464CE352}"/>
               </a:ext>
             </a:extLst>
           </p:cNvPr>
@@ -9166,7 +9174,7 @@
           <p:cNvPr id="2" name="">
             <a:extLst xmlns:a="http://schemas.openxmlformats.org/drawingml/2006/main">
               <a:ext uri="{FF2B5EF4-FFF2-40B4-BE49-F238E27FC236}">
-                <a16:creationId xmlns:a16="http://schemas.microsoft.com/office/drawing/2014/main" id="{BAD2A42E-15CC-43BF-9857-305378982244}"/>
+                <a16:creationId xmlns:a16="http://schemas.microsoft.com/office/drawing/2014/main" id="{C3B490E4-E109-4ADD-81C8-35132B2506CD}"/>
               </a:ext>
             </a:extLst>
           </p:cNvPr>
@@ -9223,7 +9231,7 @@
           <p:cNvPr id="3" name="">
             <a:extLst xmlns:a="http://schemas.openxmlformats.org/drawingml/2006/main">
               <a:ext uri="{FF2B5EF4-FFF2-40B4-BE49-F238E27FC236}">
-                <a16:creationId xmlns:a16="http://schemas.microsoft.com/office/drawing/2014/main" id="{42536D0A-54DC-47B9-BB21-CD2932AF7A00}"/>
+                <a16:creationId xmlns:a16="http://schemas.microsoft.com/office/drawing/2014/main" id="{3AAB1B6B-C747-4523-AB26-0B7C5F8B9E98}"/>
               </a:ext>
             </a:extLst>
           </p:cNvPr>
@@ -9255,7 +9263,7 @@
           <p:cNvPr id="4" name="">
             <a:extLst xmlns:a="http://schemas.openxmlformats.org/drawingml/2006/main">
               <a:ext uri="{FF2B5EF4-FFF2-40B4-BE49-F238E27FC236}">
-                <a16:creationId xmlns:a16="http://schemas.microsoft.com/office/drawing/2014/main" id="{ECE8DFB9-42FC-4B64-8E0B-68D5D3C84C45}"/>
+                <a16:creationId xmlns:a16="http://schemas.microsoft.com/office/drawing/2014/main" id="{A9572873-F04E-4C9D-9027-77CD5844BA52}"/>
               </a:ext>
             </a:extLst>
           </p:cNvPr>
@@ -9312,7 +9320,7 @@
           <p:cNvPr id="5" name="">
             <a:extLst xmlns:a="http://schemas.openxmlformats.org/drawingml/2006/main">
               <a:ext uri="{FF2B5EF4-FFF2-40B4-BE49-F238E27FC236}">
-                <a16:creationId xmlns:a16="http://schemas.microsoft.com/office/drawing/2014/main" id="{410A0C2E-579B-45D6-93B5-1BF1BD90EB64}"/>
+                <a16:creationId xmlns:a16="http://schemas.microsoft.com/office/drawing/2014/main" id="{B3E1BCC9-32B1-449D-BB66-82095CF7B364}"/>
               </a:ext>
             </a:extLst>
           </p:cNvPr>
@@ -9369,7 +9377,7 @@
           <p:cNvPr id="6" name="">
             <a:extLst xmlns:a="http://schemas.openxmlformats.org/drawingml/2006/main">
               <a:ext uri="{FF2B5EF4-FFF2-40B4-BE49-F238E27FC236}">
-                <a16:creationId xmlns:a16="http://schemas.microsoft.com/office/drawing/2014/main" id="{DDEA065B-41EF-492B-AF52-76256C838899}"/>
+                <a16:creationId xmlns:a16="http://schemas.microsoft.com/office/drawing/2014/main" id="{E71E09E9-DD40-44F2-9F8D-7D02EE4A93BE}"/>
               </a:ext>
             </a:extLst>
           </p:cNvPr>
@@ -9426,7 +9434,7 @@
           <p:cNvPr id="7" name="">
             <a:extLst xmlns:a="http://schemas.openxmlformats.org/drawingml/2006/main">
               <a:ext uri="{FF2B5EF4-FFF2-40B4-BE49-F238E27FC236}">
-                <a16:creationId xmlns:a16="http://schemas.microsoft.com/office/drawing/2014/main" id="{34409B23-0748-48CE-8077-AAE9F0236E34}"/>
+                <a16:creationId xmlns:a16="http://schemas.microsoft.com/office/drawing/2014/main" id="{636CA8AC-948E-43AF-9A71-109AD3F68843}"/>
               </a:ext>
             </a:extLst>
           </p:cNvPr>
@@ -9458,7 +9466,7 @@
           <p:cNvPr id="8" name="">
             <a:extLst xmlns:a="http://schemas.openxmlformats.org/drawingml/2006/main">
               <a:ext uri="{FF2B5EF4-FFF2-40B4-BE49-F238E27FC236}">
-                <a16:creationId xmlns:a16="http://schemas.microsoft.com/office/drawing/2014/main" id="{2758DF80-02A2-4A1F-8C19-2C4A1A428DB3}"/>
+                <a16:creationId xmlns:a16="http://schemas.microsoft.com/office/drawing/2014/main" id="{20191850-D747-434F-899F-B537B381B568}"/>
               </a:ext>
             </a:extLst>
           </p:cNvPr>
@@ -9515,7 +9523,7 @@
           <p:cNvPr id="9" name="">
             <a:extLst xmlns:a="http://schemas.openxmlformats.org/drawingml/2006/main">
               <a:ext uri="{FF2B5EF4-FFF2-40B4-BE49-F238E27FC236}">
-                <a16:creationId xmlns:a16="http://schemas.microsoft.com/office/drawing/2014/main" id="{3BE54C8C-EB2B-4CA1-AB51-41A7D4DFE012}"/>
+                <a16:creationId xmlns:a16="http://schemas.microsoft.com/office/drawing/2014/main" id="{32C4BB22-43CD-42CE-83F7-F98CBF35CA24}"/>
               </a:ext>
             </a:extLst>
           </p:cNvPr>
@@ -9572,7 +9580,7 @@
           <p:cNvPr id="10" name="">
             <a:extLst xmlns:a="http://schemas.openxmlformats.org/drawingml/2006/main">
               <a:ext uri="{FF2B5EF4-FFF2-40B4-BE49-F238E27FC236}">
-                <a16:creationId xmlns:a16="http://schemas.microsoft.com/office/drawing/2014/main" id="{B5C43073-1B9F-4A5B-8049-96AB681D0315}"/>
+                <a16:creationId xmlns:a16="http://schemas.microsoft.com/office/drawing/2014/main" id="{D0638FDD-A09C-441A-B9EA-98A00518C747}"/>
               </a:ext>
             </a:extLst>
           </p:cNvPr>
@@ -9629,7 +9637,7 @@
           <p:cNvPr id="11" name="">
             <a:extLst xmlns:a="http://schemas.openxmlformats.org/drawingml/2006/main">
               <a:ext uri="{FF2B5EF4-FFF2-40B4-BE49-F238E27FC236}">
-                <a16:creationId xmlns:a16="http://schemas.microsoft.com/office/drawing/2014/main" id="{99FA1BC4-5C96-426C-98C7-AE056738B9E3}"/>
+                <a16:creationId xmlns:a16="http://schemas.microsoft.com/office/drawing/2014/main" id="{CDE4D848-DA7E-443B-81DE-B3A2FC5F7956}"/>
               </a:ext>
             </a:extLst>
           </p:cNvPr>
@@ -9686,7 +9694,7 @@
           <p:cNvPr id="12" name="">
             <a:extLst xmlns:a="http://schemas.openxmlformats.org/drawingml/2006/main">
               <a:ext uri="{FF2B5EF4-FFF2-40B4-BE49-F238E27FC236}">
-                <a16:creationId xmlns:a16="http://schemas.microsoft.com/office/drawing/2014/main" id="{915CA5C9-8161-4F17-BF63-7D5F5F11B096}"/>
+                <a16:creationId xmlns:a16="http://schemas.microsoft.com/office/drawing/2014/main" id="{883316D9-90B6-41A3-8C71-78BF7A6A9D04}"/>
               </a:ext>
             </a:extLst>
           </p:cNvPr>
@@ -9718,7 +9726,7 @@
           <p:cNvPr id="13" name="">
             <a:extLst xmlns:a="http://schemas.openxmlformats.org/drawingml/2006/main">
               <a:ext uri="{FF2B5EF4-FFF2-40B4-BE49-F238E27FC236}">
-                <a16:creationId xmlns:a16="http://schemas.microsoft.com/office/drawing/2014/main" id="{73D762A8-11E2-4414-90EB-05CDD232AB7C}"/>
+                <a16:creationId xmlns:a16="http://schemas.microsoft.com/office/drawing/2014/main" id="{A609D0C2-4E57-41B1-932E-F178678DEE6B}"/>
               </a:ext>
             </a:extLst>
           </p:cNvPr>
@@ -9775,7 +9783,7 @@
           <p:cNvPr id="14" name="">
             <a:extLst xmlns:a="http://schemas.openxmlformats.org/drawingml/2006/main">
               <a:ext uri="{FF2B5EF4-FFF2-40B4-BE49-F238E27FC236}">
-                <a16:creationId xmlns:a16="http://schemas.microsoft.com/office/drawing/2014/main" id="{DAB62B37-2A5B-4453-932A-DD2011EAC0FD}"/>
+                <a16:creationId xmlns:a16="http://schemas.microsoft.com/office/drawing/2014/main" id="{96E4E538-5CC7-4B09-A504-B71098120A2F}"/>
               </a:ext>
             </a:extLst>
           </p:cNvPr>
@@ -9830,7 +9838,7 @@
     </p:spTree>
     <p:extLst>
       <p:ext uri="{BB962C8B-B14F-4D97-AF65-F5344CB8AC3E}">
-        <p14:creationId xmlns:p14="http://schemas.microsoft.com/office/powerpoint/2010/main" val="1485913820"/>
+        <p14:creationId xmlns:p14="http://schemas.microsoft.com/office/powerpoint/2010/main" val="732521297"/>
       </p:ext>
     </p:extLst>
   </p:cSld>
@@ -10031,7 +10039,7 @@
           <p:cNvPr id="16" name="">
             <a:extLst xmlns:a="http://schemas.openxmlformats.org/drawingml/2006/main">
               <a:ext uri="{FF2B5EF4-FFF2-40B4-BE49-F238E27FC236}">
-                <a16:creationId xmlns:a16="http://schemas.microsoft.com/office/drawing/2014/main" id="{25687384-D0A1-482D-846B-9D6719FFE6BE}"/>
+                <a16:creationId xmlns:a16="http://schemas.microsoft.com/office/drawing/2014/main" id="{6862374E-E0DB-40C8-8236-C02A329D6772}"/>
               </a:ext>
             </a:extLst>
           </p:cNvPr>
@@ -10063,7 +10071,7 @@
           <p:cNvPr id="2" name="">
             <a:extLst xmlns:a="http://schemas.openxmlformats.org/drawingml/2006/main">
               <a:ext uri="{FF2B5EF4-FFF2-40B4-BE49-F238E27FC236}">
-                <a16:creationId xmlns:a16="http://schemas.microsoft.com/office/drawing/2014/main" id="{3737B7DC-3A44-4047-9499-AA8150EB5EB9}"/>
+                <a16:creationId xmlns:a16="http://schemas.microsoft.com/office/drawing/2014/main" id="{23F464F2-4CC6-4346-A389-D3A05E3579CD}"/>
               </a:ext>
             </a:extLst>
           </p:cNvPr>
@@ -10120,7 +10128,7 @@
           <p:cNvPr id="3" name="">
             <a:extLst xmlns:a="http://schemas.openxmlformats.org/drawingml/2006/main">
               <a:ext uri="{FF2B5EF4-FFF2-40B4-BE49-F238E27FC236}">
-                <a16:creationId xmlns:a16="http://schemas.microsoft.com/office/drawing/2014/main" id="{CC34B7DC-D61B-4AC9-A1E9-20A2ADD5B3B2}"/>
+                <a16:creationId xmlns:a16="http://schemas.microsoft.com/office/drawing/2014/main" id="{D4628B30-1E75-4A8C-B894-AD4F7B75C3C2}"/>
               </a:ext>
             </a:extLst>
           </p:cNvPr>
@@ -10152,7 +10160,7 @@
           <p:cNvPr id="4" name="">
             <a:extLst xmlns:a="http://schemas.openxmlformats.org/drawingml/2006/main">
               <a:ext uri="{FF2B5EF4-FFF2-40B4-BE49-F238E27FC236}">
-                <a16:creationId xmlns:a16="http://schemas.microsoft.com/office/drawing/2014/main" id="{DDC2A150-AFE4-4D9E-BF01-CF31238E9C33}"/>
+                <a16:creationId xmlns:a16="http://schemas.microsoft.com/office/drawing/2014/main" id="{23B92B9D-A197-4741-9D3D-E908994ACADE}"/>
               </a:ext>
             </a:extLst>
           </p:cNvPr>
@@ -10209,7 +10217,7 @@
           <p:cNvPr id="5" name="">
             <a:extLst xmlns:a="http://schemas.openxmlformats.org/drawingml/2006/main">
               <a:ext uri="{FF2B5EF4-FFF2-40B4-BE49-F238E27FC236}">
-                <a16:creationId xmlns:a16="http://schemas.microsoft.com/office/drawing/2014/main" id="{0868A352-3F71-47CA-80F0-501ACD510C95}"/>
+                <a16:creationId xmlns:a16="http://schemas.microsoft.com/office/drawing/2014/main" id="{97B1CE68-C039-461F-B78A-2047E84B3F0F}"/>
               </a:ext>
             </a:extLst>
           </p:cNvPr>
@@ -10266,7 +10274,7 @@
           <p:cNvPr id="6" name="">
             <a:extLst xmlns:a="http://schemas.openxmlformats.org/drawingml/2006/main">
               <a:ext uri="{FF2B5EF4-FFF2-40B4-BE49-F238E27FC236}">
-                <a16:creationId xmlns:a16="http://schemas.microsoft.com/office/drawing/2014/main" id="{DEDE4B7D-5938-474F-A465-9422956305A4}"/>
+                <a16:creationId xmlns:a16="http://schemas.microsoft.com/office/drawing/2014/main" id="{00207084-29D3-40DE-84D2-7F0129E144CB}"/>
               </a:ext>
             </a:extLst>
           </p:cNvPr>
@@ -10323,7 +10331,7 @@
           <p:cNvPr id="7" name="">
             <a:extLst xmlns:a="http://schemas.openxmlformats.org/drawingml/2006/main">
               <a:ext uri="{FF2B5EF4-FFF2-40B4-BE49-F238E27FC236}">
-                <a16:creationId xmlns:a16="http://schemas.microsoft.com/office/drawing/2014/main" id="{4E94162B-F301-472D-9E56-02CC1D2183AF}"/>
+                <a16:creationId xmlns:a16="http://schemas.microsoft.com/office/drawing/2014/main" id="{FEFB589B-A02C-4708-B270-50E2E2B4B0E8}"/>
               </a:ext>
             </a:extLst>
           </p:cNvPr>
@@ -10355,7 +10363,7 @@
           <p:cNvPr id="8" name="">
             <a:extLst xmlns:a="http://schemas.openxmlformats.org/drawingml/2006/main">
               <a:ext uri="{FF2B5EF4-FFF2-40B4-BE49-F238E27FC236}">
-                <a16:creationId xmlns:a16="http://schemas.microsoft.com/office/drawing/2014/main" id="{56065DB5-0E5D-41DA-ADAB-289F27E77E72}"/>
+                <a16:creationId xmlns:a16="http://schemas.microsoft.com/office/drawing/2014/main" id="{E071D13C-8205-4D31-BF05-7DC492F971E0}"/>
               </a:ext>
             </a:extLst>
           </p:cNvPr>
@@ -10412,7 +10420,7 @@
           <p:cNvPr id="9" name="">
             <a:extLst xmlns:a="http://schemas.openxmlformats.org/drawingml/2006/main">
               <a:ext uri="{FF2B5EF4-FFF2-40B4-BE49-F238E27FC236}">
-                <a16:creationId xmlns:a16="http://schemas.microsoft.com/office/drawing/2014/main" id="{011D9EC5-0FDD-4B1C-8B09-1066FF8E722F}"/>
+                <a16:creationId xmlns:a16="http://schemas.microsoft.com/office/drawing/2014/main" id="{3400A1B1-9B38-46AD-89C7-2CB493C79324}"/>
               </a:ext>
             </a:extLst>
           </p:cNvPr>
@@ -10469,7 +10477,7 @@
           <p:cNvPr id="10" name="">
             <a:extLst xmlns:a="http://schemas.openxmlformats.org/drawingml/2006/main">
               <a:ext uri="{FF2B5EF4-FFF2-40B4-BE49-F238E27FC236}">
-                <a16:creationId xmlns:a16="http://schemas.microsoft.com/office/drawing/2014/main" id="{DA2367B6-A10C-4EF7-BC05-3839706E0AAA}"/>
+                <a16:creationId xmlns:a16="http://schemas.microsoft.com/office/drawing/2014/main" id="{EC0D4039-D3D9-4260-8D92-6B7421E5114C}"/>
               </a:ext>
             </a:extLst>
           </p:cNvPr>
@@ -10526,7 +10534,7 @@
           <p:cNvPr id="11" name="">
             <a:extLst xmlns:a="http://schemas.openxmlformats.org/drawingml/2006/main">
               <a:ext uri="{FF2B5EF4-FFF2-40B4-BE49-F238E27FC236}">
-                <a16:creationId xmlns:a16="http://schemas.microsoft.com/office/drawing/2014/main" id="{112021B8-E2F6-449E-8CB3-1C57B658269C}"/>
+                <a16:creationId xmlns:a16="http://schemas.microsoft.com/office/drawing/2014/main" id="{7320FEFE-3017-42C0-AA02-0456A0E12E98}"/>
               </a:ext>
             </a:extLst>
           </p:cNvPr>
@@ -10583,7 +10591,7 @@
           <p:cNvPr id="12" name="">
             <a:extLst xmlns:a="http://schemas.openxmlformats.org/drawingml/2006/main">
               <a:ext uri="{FF2B5EF4-FFF2-40B4-BE49-F238E27FC236}">
-                <a16:creationId xmlns:a16="http://schemas.microsoft.com/office/drawing/2014/main" id="{F1481F35-0EE3-469A-B372-6E79AE0EDFC8}"/>
+                <a16:creationId xmlns:a16="http://schemas.microsoft.com/office/drawing/2014/main" id="{E282E0EC-A2F3-4EA7-B6C2-2D91741F3A46}"/>
               </a:ext>
             </a:extLst>
           </p:cNvPr>
@@ -10640,7 +10648,7 @@
           <p:cNvPr id="13" name="">
             <a:extLst xmlns:a="http://schemas.openxmlformats.org/drawingml/2006/main">
               <a:ext uri="{FF2B5EF4-FFF2-40B4-BE49-F238E27FC236}">
-                <a16:creationId xmlns:a16="http://schemas.microsoft.com/office/drawing/2014/main" id="{9A78FF22-4023-4EF9-9A8B-538C0C2FB44C}"/>
+                <a16:creationId xmlns:a16="http://schemas.microsoft.com/office/drawing/2014/main" id="{1BF2399B-392E-4CC6-AC07-911CF3C553E5}"/>
               </a:ext>
             </a:extLst>
           </p:cNvPr>
@@ -10697,7 +10705,7 @@
           <p:cNvPr id="14" name="">
             <a:extLst xmlns:a="http://schemas.openxmlformats.org/drawingml/2006/main">
               <a:ext uri="{FF2B5EF4-FFF2-40B4-BE49-F238E27FC236}">
-                <a16:creationId xmlns:a16="http://schemas.microsoft.com/office/drawing/2014/main" id="{510A9359-0BF2-42C7-8041-2B3E274E1BA3}"/>
+                <a16:creationId xmlns:a16="http://schemas.microsoft.com/office/drawing/2014/main" id="{F16B981D-252E-493C-AC24-0F13A7BFFDC7}"/>
               </a:ext>
             </a:extLst>
           </p:cNvPr>
@@ -10754,7 +10762,7 @@
           <p:cNvPr id="15" name="">
             <a:extLst xmlns:a="http://schemas.openxmlformats.org/drawingml/2006/main">
               <a:ext uri="{FF2B5EF4-FFF2-40B4-BE49-F238E27FC236}">
-                <a16:creationId xmlns:a16="http://schemas.microsoft.com/office/drawing/2014/main" id="{8E7FA963-EC9A-4DE8-865A-07D6109663EA}"/>
+                <a16:creationId xmlns:a16="http://schemas.microsoft.com/office/drawing/2014/main" id="{61F606C7-1D66-443B-A0FB-17A56BE28D69}"/>
               </a:ext>
             </a:extLst>
           </p:cNvPr>
@@ -10809,7 +10817,7 @@
     </p:spTree>
     <p:extLst>
       <p:ext uri="{BB962C8B-B14F-4D97-AF65-F5344CB8AC3E}">
-        <p14:creationId xmlns:p14="http://schemas.microsoft.com/office/powerpoint/2010/main" val="155890037"/>
+        <p14:creationId xmlns:p14="http://schemas.microsoft.com/office/powerpoint/2010/main" val="1047809125"/>
       </p:ext>
     </p:extLst>
   </p:cSld>
@@ -10964,7 +10972,7 @@
           <p:cNvPr id="16" name="">
             <a:extLst xmlns:a="http://schemas.openxmlformats.org/drawingml/2006/main">
               <a:ext uri="{FF2B5EF4-FFF2-40B4-BE49-F238E27FC236}">
-                <a16:creationId xmlns:a16="http://schemas.microsoft.com/office/drawing/2014/main" id="{0BCC341F-4D30-48CD-A7FB-2BB1BE42A69D}"/>
+                <a16:creationId xmlns:a16="http://schemas.microsoft.com/office/drawing/2014/main" id="{8677A9F2-3DD0-4CE6-A515-AB3A79B25466}"/>
               </a:ext>
             </a:extLst>
           </p:cNvPr>
@@ -10996,7 +11004,7 @@
           <p:cNvPr id="2" name="">
             <a:extLst xmlns:a="http://schemas.openxmlformats.org/drawingml/2006/main">
               <a:ext uri="{FF2B5EF4-FFF2-40B4-BE49-F238E27FC236}">
-                <a16:creationId xmlns:a16="http://schemas.microsoft.com/office/drawing/2014/main" id="{520B25C3-207D-48F2-9983-632A38A4B4AF}"/>
+                <a16:creationId xmlns:a16="http://schemas.microsoft.com/office/drawing/2014/main" id="{7511D249-70FA-4468-A597-1619217095D7}"/>
               </a:ext>
             </a:extLst>
           </p:cNvPr>
@@ -11053,7 +11061,7 @@
           <p:cNvPr id="3" name="">
             <a:extLst xmlns:a="http://schemas.openxmlformats.org/drawingml/2006/main">
               <a:ext uri="{FF2B5EF4-FFF2-40B4-BE49-F238E27FC236}">
-                <a16:creationId xmlns:a16="http://schemas.microsoft.com/office/drawing/2014/main" id="{00ADBE84-90F9-4E8C-8886-4D93BE84D8BE}"/>
+                <a16:creationId xmlns:a16="http://schemas.microsoft.com/office/drawing/2014/main" id="{2952E585-5622-4CFE-8DB4-4990C64210FD}"/>
               </a:ext>
             </a:extLst>
           </p:cNvPr>
@@ -11085,7 +11093,7 @@
           <p:cNvPr id="4" name="">
             <a:extLst xmlns:a="http://schemas.openxmlformats.org/drawingml/2006/main">
               <a:ext uri="{FF2B5EF4-FFF2-40B4-BE49-F238E27FC236}">
-                <a16:creationId xmlns:a16="http://schemas.microsoft.com/office/drawing/2014/main" id="{D467AE0E-9F89-4D18-9D3D-7E912D42EB80}"/>
+                <a16:creationId xmlns:a16="http://schemas.microsoft.com/office/drawing/2014/main" id="{BD490A58-59E9-4C63-A090-FCEE7688C3BB}"/>
               </a:ext>
             </a:extLst>
           </p:cNvPr>
@@ -11142,7 +11150,7 @@
           <p:cNvPr id="5" name="">
             <a:extLst xmlns:a="http://schemas.openxmlformats.org/drawingml/2006/main">
               <a:ext uri="{FF2B5EF4-FFF2-40B4-BE49-F238E27FC236}">
-                <a16:creationId xmlns:a16="http://schemas.microsoft.com/office/drawing/2014/main" id="{C35D8245-49DE-4B12-A1D6-CA7F2AA0C795}"/>
+                <a16:creationId xmlns:a16="http://schemas.microsoft.com/office/drawing/2014/main" id="{20E452E3-1862-415D-94DC-63DC605B7324}"/>
               </a:ext>
             </a:extLst>
           </p:cNvPr>
@@ -11199,7 +11207,7 @@
           <p:cNvPr id="6" name="">
             <a:extLst xmlns:a="http://schemas.openxmlformats.org/drawingml/2006/main">
               <a:ext uri="{FF2B5EF4-FFF2-40B4-BE49-F238E27FC236}">
-                <a16:creationId xmlns:a16="http://schemas.microsoft.com/office/drawing/2014/main" id="{E92788CF-2EE2-4BD8-9459-1CDA2168BF18}"/>
+                <a16:creationId xmlns:a16="http://schemas.microsoft.com/office/drawing/2014/main" id="{0CD75FBA-9AC9-45BC-B139-8DC0DCDEE1A7}"/>
               </a:ext>
             </a:extLst>
           </p:cNvPr>
@@ -11256,7 +11264,7 @@
           <p:cNvPr id="7" name="">
             <a:extLst xmlns:a="http://schemas.openxmlformats.org/drawingml/2006/main">
               <a:ext uri="{FF2B5EF4-FFF2-40B4-BE49-F238E27FC236}">
-                <a16:creationId xmlns:a16="http://schemas.microsoft.com/office/drawing/2014/main" id="{CCA77BDE-B09E-408D-A7C9-3E3269B09328}"/>
+                <a16:creationId xmlns:a16="http://schemas.microsoft.com/office/drawing/2014/main" id="{829F9654-B4E2-4BCB-9BE0-6E1E39F5115C}"/>
               </a:ext>
             </a:extLst>
           </p:cNvPr>
@@ -11288,7 +11296,7 @@
           <p:cNvPr id="8" name="">
             <a:extLst xmlns:a="http://schemas.openxmlformats.org/drawingml/2006/main">
               <a:ext uri="{FF2B5EF4-FFF2-40B4-BE49-F238E27FC236}">
-                <a16:creationId xmlns:a16="http://schemas.microsoft.com/office/drawing/2014/main" id="{F430160D-90AF-4BBF-8A9C-AFC24C598AD4}"/>
+                <a16:creationId xmlns:a16="http://schemas.microsoft.com/office/drawing/2014/main" id="{419F68E8-1F32-4B0D-BD29-CE3052ACED60}"/>
               </a:ext>
             </a:extLst>
           </p:cNvPr>
@@ -11345,7 +11353,7 @@
           <p:cNvPr id="9" name="">
             <a:extLst xmlns:a="http://schemas.openxmlformats.org/drawingml/2006/main">
               <a:ext uri="{FF2B5EF4-FFF2-40B4-BE49-F238E27FC236}">
-                <a16:creationId xmlns:a16="http://schemas.microsoft.com/office/drawing/2014/main" id="{F21C78C4-291D-461A-A61E-8299656182DE}"/>
+                <a16:creationId xmlns:a16="http://schemas.microsoft.com/office/drawing/2014/main" id="{71D75413-195F-4FA6-B3CA-81DE779EB650}"/>
               </a:ext>
             </a:extLst>
           </p:cNvPr>
@@ -11406,7 +11414,7 @@
           <p:nvPr/>
         </p:nvPicPr>
         <p:blipFill>
-          <a:blip xmlns:r="http://schemas.openxmlformats.org/officeDocument/2006/relationships" xmlns:a="http://schemas.openxmlformats.org/drawingml/2006/main" r:embed="R47745d130d5c4da7"/>
+          <a:blip xmlns:r="http://schemas.openxmlformats.org/officeDocument/2006/relationships" xmlns:a="http://schemas.openxmlformats.org/drawingml/2006/main" r:embed="R71cc651886a044fe"/>
           <a:stretch xmlns:a="http://schemas.openxmlformats.org/drawingml/2006/main"/>
         </p:blipFill>
         <p:spPr>
@@ -11424,7 +11432,7 @@
           <p:cNvPr id="11" name="">
             <a:extLst xmlns:a="http://schemas.openxmlformats.org/drawingml/2006/main">
               <a:ext uri="{FF2B5EF4-FFF2-40B4-BE49-F238E27FC236}">
-                <a16:creationId xmlns:a16="http://schemas.microsoft.com/office/drawing/2014/main" id="{6926B933-F7EB-4AED-BA57-139F0BA8D3BF}"/>
+                <a16:creationId xmlns:a16="http://schemas.microsoft.com/office/drawing/2014/main" id="{FB9573DD-16DD-407A-A975-220C248E568D}"/>
               </a:ext>
             </a:extLst>
           </p:cNvPr>
@@ -11481,7 +11489,7 @@
           <p:cNvPr id="12" name="">
             <a:extLst xmlns:a="http://schemas.openxmlformats.org/drawingml/2006/main">
               <a:ext uri="{FF2B5EF4-FFF2-40B4-BE49-F238E27FC236}">
-                <a16:creationId xmlns:a16="http://schemas.microsoft.com/office/drawing/2014/main" id="{CCF95609-1206-4717-9F11-D1F9149C5DC2}"/>
+                <a16:creationId xmlns:a16="http://schemas.microsoft.com/office/drawing/2014/main" id="{1C480381-D5A7-4AB4-9C63-DA6938AE4999}"/>
               </a:ext>
             </a:extLst>
           </p:cNvPr>
@@ -11538,7 +11546,7 @@
           <p:cNvPr id="13" name="">
             <a:extLst xmlns:a="http://schemas.openxmlformats.org/drawingml/2006/main">
               <a:ext uri="{FF2B5EF4-FFF2-40B4-BE49-F238E27FC236}">
-                <a16:creationId xmlns:a16="http://schemas.microsoft.com/office/drawing/2014/main" id="{8F61255D-4A72-4B6E-BB77-7D9E3D984757}"/>
+                <a16:creationId xmlns:a16="http://schemas.microsoft.com/office/drawing/2014/main" id="{7EB567C6-522A-4D80-8B4E-EC3468041D82}"/>
               </a:ext>
             </a:extLst>
           </p:cNvPr>
@@ -11570,7 +11578,7 @@
           <p:cNvPr id="14" name="">
             <a:extLst xmlns:a="http://schemas.openxmlformats.org/drawingml/2006/main">
               <a:ext uri="{FF2B5EF4-FFF2-40B4-BE49-F238E27FC236}">
-                <a16:creationId xmlns:a16="http://schemas.microsoft.com/office/drawing/2014/main" id="{9D23E95A-5E2E-47A8-9505-4A1CF82D0360}"/>
+                <a16:creationId xmlns:a16="http://schemas.microsoft.com/office/drawing/2014/main" id="{7F56DDA0-DC56-4B6D-BDC9-33CF4A075B4D}"/>
               </a:ext>
             </a:extLst>
           </p:cNvPr>
@@ -11627,7 +11635,7 @@
           <p:cNvPr id="15" name="">
             <a:extLst xmlns:a="http://schemas.openxmlformats.org/drawingml/2006/main">
               <a:ext uri="{FF2B5EF4-FFF2-40B4-BE49-F238E27FC236}">
-                <a16:creationId xmlns:a16="http://schemas.microsoft.com/office/drawing/2014/main" id="{6CD44FBB-F209-4E88-A195-A9C0FE07183E}"/>
+                <a16:creationId xmlns:a16="http://schemas.microsoft.com/office/drawing/2014/main" id="{C87A8E42-8764-426E-9016-B8A32AE21EC0}"/>
               </a:ext>
             </a:extLst>
           </p:cNvPr>
@@ -11682,7 +11690,7 @@
     </p:spTree>
     <p:extLst>
       <p:ext uri="{BB962C8B-B14F-4D97-AF65-F5344CB8AC3E}">
-        <p14:creationId xmlns:p14="http://schemas.microsoft.com/office/powerpoint/2010/main" val="1915064647"/>
+        <p14:creationId xmlns:p14="http://schemas.microsoft.com/office/powerpoint/2010/main" val="1539906459"/>
       </p:ext>
     </p:extLst>
   </p:cSld>
@@ -11837,7 +11845,7 @@
           <p:cNvPr id="23" name="">
             <a:extLst xmlns:a="http://schemas.openxmlformats.org/drawingml/2006/main">
               <a:ext uri="{FF2B5EF4-FFF2-40B4-BE49-F238E27FC236}">
-                <a16:creationId xmlns:a16="http://schemas.microsoft.com/office/drawing/2014/main" id="{F8CC1455-EA57-467B-99F2-695BCE5BA6A5}"/>
+                <a16:creationId xmlns:a16="http://schemas.microsoft.com/office/drawing/2014/main" id="{2F83525E-8AF9-4A24-A2A6-71C76C42A6A5}"/>
               </a:ext>
             </a:extLst>
           </p:cNvPr>
@@ -11869,7 +11877,7 @@
           <p:cNvPr id="2" name="">
             <a:extLst xmlns:a="http://schemas.openxmlformats.org/drawingml/2006/main">
               <a:ext uri="{FF2B5EF4-FFF2-40B4-BE49-F238E27FC236}">
-                <a16:creationId xmlns:a16="http://schemas.microsoft.com/office/drawing/2014/main" id="{9A29656D-F32A-437A-A9C5-69D59F5AC348}"/>
+                <a16:creationId xmlns:a16="http://schemas.microsoft.com/office/drawing/2014/main" id="{EC80137F-5D63-4C23-BE4E-A48630B2C53C}"/>
               </a:ext>
             </a:extLst>
           </p:cNvPr>
@@ -11926,7 +11934,7 @@
           <p:cNvPr id="3" name="">
             <a:extLst xmlns:a="http://schemas.openxmlformats.org/drawingml/2006/main">
               <a:ext uri="{FF2B5EF4-FFF2-40B4-BE49-F238E27FC236}">
-                <a16:creationId xmlns:a16="http://schemas.microsoft.com/office/drawing/2014/main" id="{195580C0-0B18-4059-AF42-83343E2668CD}"/>
+                <a16:creationId xmlns:a16="http://schemas.microsoft.com/office/drawing/2014/main" id="{55C22DDA-6497-43A0-8869-4F3F19A15755}"/>
               </a:ext>
             </a:extLst>
           </p:cNvPr>
@@ -11958,7 +11966,7 @@
           <p:cNvPr id="4" name="">
             <a:extLst xmlns:a="http://schemas.openxmlformats.org/drawingml/2006/main">
               <a:ext uri="{FF2B5EF4-FFF2-40B4-BE49-F238E27FC236}">
-                <a16:creationId xmlns:a16="http://schemas.microsoft.com/office/drawing/2014/main" id="{0E774B4D-54D4-4BFA-8CBA-D52E33DD0BD2}"/>
+                <a16:creationId xmlns:a16="http://schemas.microsoft.com/office/drawing/2014/main" id="{8B7AC0D1-9297-4BA9-829F-2431466784F9}"/>
               </a:ext>
             </a:extLst>
           </p:cNvPr>
@@ -12015,7 +12023,7 @@
           <p:cNvPr id="5" name="">
             <a:extLst xmlns:a="http://schemas.openxmlformats.org/drawingml/2006/main">
               <a:ext uri="{FF2B5EF4-FFF2-40B4-BE49-F238E27FC236}">
-                <a16:creationId xmlns:a16="http://schemas.microsoft.com/office/drawing/2014/main" id="{260D85B8-CA62-457E-A112-D665BA87B7A1}"/>
+                <a16:creationId xmlns:a16="http://schemas.microsoft.com/office/drawing/2014/main" id="{63C1976B-3011-4D00-95A0-4641B5BD18EA}"/>
               </a:ext>
             </a:extLst>
           </p:cNvPr>
@@ -12072,7 +12080,7 @@
           <p:cNvPr id="6" name="">
             <a:extLst xmlns:a="http://schemas.openxmlformats.org/drawingml/2006/main">
               <a:ext uri="{FF2B5EF4-FFF2-40B4-BE49-F238E27FC236}">
-                <a16:creationId xmlns:a16="http://schemas.microsoft.com/office/drawing/2014/main" id="{E962C003-9AB5-4FC8-91D4-FD5F902AE2BA}"/>
+                <a16:creationId xmlns:a16="http://schemas.microsoft.com/office/drawing/2014/main" id="{9084CC25-AF79-4FD5-A9DE-E29A4F46F82C}"/>
               </a:ext>
             </a:extLst>
           </p:cNvPr>
@@ -12129,7 +12137,7 @@
           <p:cNvPr id="7" name="">
             <a:extLst xmlns:a="http://schemas.openxmlformats.org/drawingml/2006/main">
               <a:ext uri="{FF2B5EF4-FFF2-40B4-BE49-F238E27FC236}">
-                <a16:creationId xmlns:a16="http://schemas.microsoft.com/office/drawing/2014/main" id="{822A25CF-3987-4A61-AEE8-936ED84CD6F1}"/>
+                <a16:creationId xmlns:a16="http://schemas.microsoft.com/office/drawing/2014/main" id="{3D42AC85-A1C7-46DA-9869-B4226DCD42B0}"/>
               </a:ext>
             </a:extLst>
           </p:cNvPr>
@@ -12161,7 +12169,7 @@
           <p:cNvPr id="8" name="">
             <a:extLst xmlns:a="http://schemas.openxmlformats.org/drawingml/2006/main">
               <a:ext uri="{FF2B5EF4-FFF2-40B4-BE49-F238E27FC236}">
-                <a16:creationId xmlns:a16="http://schemas.microsoft.com/office/drawing/2014/main" id="{91B3454A-930C-4D52-9F26-3D09E481B062}"/>
+                <a16:creationId xmlns:a16="http://schemas.microsoft.com/office/drawing/2014/main" id="{9BFD02F2-94FC-42A7-A26C-611ABD6F638E}"/>
               </a:ext>
             </a:extLst>
           </p:cNvPr>
@@ -12218,7 +12226,7 @@
           <p:cNvPr id="9" name="">
             <a:extLst xmlns:a="http://schemas.openxmlformats.org/drawingml/2006/main">
               <a:ext uri="{FF2B5EF4-FFF2-40B4-BE49-F238E27FC236}">
-                <a16:creationId xmlns:a16="http://schemas.microsoft.com/office/drawing/2014/main" id="{C4D3B880-DAF8-4537-9F0B-1A9F07DD7EEF}"/>
+                <a16:creationId xmlns:a16="http://schemas.microsoft.com/office/drawing/2014/main" id="{FB2CF75A-3FF2-4D1B-8CF2-DB62A9F50926}"/>
               </a:ext>
             </a:extLst>
           </p:cNvPr>
@@ -12275,7 +12283,7 @@
           <p:cNvPr id="10" name="">
             <a:extLst xmlns:a="http://schemas.openxmlformats.org/drawingml/2006/main">
               <a:ext uri="{FF2B5EF4-FFF2-40B4-BE49-F238E27FC236}">
-                <a16:creationId xmlns:a16="http://schemas.microsoft.com/office/drawing/2014/main" id="{5459AF02-D812-4751-910C-508853D5312B}"/>
+                <a16:creationId xmlns:a16="http://schemas.microsoft.com/office/drawing/2014/main" id="{19F2795E-E65B-4215-9736-757256EB8240}"/>
               </a:ext>
             </a:extLst>
           </p:cNvPr>
@@ -12309,7 +12317,7 @@
           <p:cNvPr id="11" name="">
             <a:extLst xmlns:a="http://schemas.openxmlformats.org/drawingml/2006/main">
               <a:ext uri="{FF2B5EF4-FFF2-40B4-BE49-F238E27FC236}">
-                <a16:creationId xmlns:a16="http://schemas.microsoft.com/office/drawing/2014/main" id="{9C45FEB4-A71F-4F39-BD1C-6751B9AB8664}"/>
+                <a16:creationId xmlns:a16="http://schemas.microsoft.com/office/drawing/2014/main" id="{B6160A73-EF5A-44D3-946C-78C588AAC43E}"/>
               </a:ext>
             </a:extLst>
           </p:cNvPr>
@@ -12341,7 +12349,7 @@
           <p:cNvPr id="12" name="">
             <a:extLst xmlns:a="http://schemas.openxmlformats.org/drawingml/2006/main">
               <a:ext uri="{FF2B5EF4-FFF2-40B4-BE49-F238E27FC236}">
-                <a16:creationId xmlns:a16="http://schemas.microsoft.com/office/drawing/2014/main" id="{95AE2353-06A7-43F6-BBA5-055314743362}"/>
+                <a16:creationId xmlns:a16="http://schemas.microsoft.com/office/drawing/2014/main" id="{82DBEB88-A475-4E5E-B342-BFA94D5C1696}"/>
               </a:ext>
             </a:extLst>
           </p:cNvPr>
@@ -12398,7 +12406,7 @@
           <p:cNvPr id="13" name="">
             <a:extLst xmlns:a="http://schemas.openxmlformats.org/drawingml/2006/main">
               <a:ext uri="{FF2B5EF4-FFF2-40B4-BE49-F238E27FC236}">
-                <a16:creationId xmlns:a16="http://schemas.microsoft.com/office/drawing/2014/main" id="{4AC77572-ADAE-4347-A766-C71EB3D197BB}"/>
+                <a16:creationId xmlns:a16="http://schemas.microsoft.com/office/drawing/2014/main" id="{751FBFF4-071E-467B-9920-B3F8459C8618}"/>
               </a:ext>
             </a:extLst>
           </p:cNvPr>
@@ -12455,7 +12463,7 @@
           <p:cNvPr id="14" name="">
             <a:extLst xmlns:a="http://schemas.openxmlformats.org/drawingml/2006/main">
               <a:ext uri="{FF2B5EF4-FFF2-40B4-BE49-F238E27FC236}">
-                <a16:creationId xmlns:a16="http://schemas.microsoft.com/office/drawing/2014/main" id="{ABB7D50E-C62C-4FCA-B4C2-26311573B521}"/>
+                <a16:creationId xmlns:a16="http://schemas.microsoft.com/office/drawing/2014/main" id="{E85CCC1D-2127-4565-A5D3-009BEFEAF2E3}"/>
               </a:ext>
             </a:extLst>
           </p:cNvPr>
@@ -12489,7 +12497,7 @@
           <p:cNvPr id="15" name="">
             <a:extLst xmlns:a="http://schemas.openxmlformats.org/drawingml/2006/main">
               <a:ext uri="{FF2B5EF4-FFF2-40B4-BE49-F238E27FC236}">
-                <a16:creationId xmlns:a16="http://schemas.microsoft.com/office/drawing/2014/main" id="{8B55CC11-ECEA-4A48-B0A0-2A1E16FE8D84}"/>
+                <a16:creationId xmlns:a16="http://schemas.microsoft.com/office/drawing/2014/main" id="{B2846F63-B4BA-4CFE-9E76-90F13EFB07D1}"/>
               </a:ext>
             </a:extLst>
           </p:cNvPr>
@@ -12521,7 +12529,7 @@
           <p:cNvPr id="16" name="">
             <a:extLst xmlns:a="http://schemas.openxmlformats.org/drawingml/2006/main">
               <a:ext uri="{FF2B5EF4-FFF2-40B4-BE49-F238E27FC236}">
-                <a16:creationId xmlns:a16="http://schemas.microsoft.com/office/drawing/2014/main" id="{EDF238A3-2C0D-4E61-8B53-2617E650EE0F}"/>
+                <a16:creationId xmlns:a16="http://schemas.microsoft.com/office/drawing/2014/main" id="{74215548-CF58-45D0-98D2-A2420494861B}"/>
               </a:ext>
             </a:extLst>
           </p:cNvPr>
@@ -12578,7 +12586,7 @@
           <p:cNvPr id="17" name="">
             <a:extLst xmlns:a="http://schemas.openxmlformats.org/drawingml/2006/main">
               <a:ext uri="{FF2B5EF4-FFF2-40B4-BE49-F238E27FC236}">
-                <a16:creationId xmlns:a16="http://schemas.microsoft.com/office/drawing/2014/main" id="{73EF7AA7-DC5B-4A2D-A8F4-804D420E9ED4}"/>
+                <a16:creationId xmlns:a16="http://schemas.microsoft.com/office/drawing/2014/main" id="{37B8F2F7-AC67-4291-A9A4-6A58AB396C49}"/>
               </a:ext>
             </a:extLst>
           </p:cNvPr>
@@ -12635,7 +12643,7 @@
           <p:cNvPr id="18" name="">
             <a:extLst xmlns:a="http://schemas.openxmlformats.org/drawingml/2006/main">
               <a:ext uri="{FF2B5EF4-FFF2-40B4-BE49-F238E27FC236}">
-                <a16:creationId xmlns:a16="http://schemas.microsoft.com/office/drawing/2014/main" id="{F1DD43D4-71D0-45E0-8BB6-1ECBBF4BB52D}"/>
+                <a16:creationId xmlns:a16="http://schemas.microsoft.com/office/drawing/2014/main" id="{CF0B23B9-FA4D-48A6-B6A1-9929F9927CC5}"/>
               </a:ext>
             </a:extLst>
           </p:cNvPr>
@@ -12669,7 +12677,7 @@
           <p:cNvPr id="19" name="">
             <a:extLst xmlns:a="http://schemas.openxmlformats.org/drawingml/2006/main">
               <a:ext uri="{FF2B5EF4-FFF2-40B4-BE49-F238E27FC236}">
-                <a16:creationId xmlns:a16="http://schemas.microsoft.com/office/drawing/2014/main" id="{C9A5A315-503A-4E7C-8F1C-713AB654AA63}"/>
+                <a16:creationId xmlns:a16="http://schemas.microsoft.com/office/drawing/2014/main" id="{FFD07CBF-5630-415F-A17C-5BC21A9D6A93}"/>
               </a:ext>
             </a:extLst>
           </p:cNvPr>
@@ -12701,7 +12709,7 @@
           <p:cNvPr id="20" name="">
             <a:extLst xmlns:a="http://schemas.openxmlformats.org/drawingml/2006/main">
               <a:ext uri="{FF2B5EF4-FFF2-40B4-BE49-F238E27FC236}">
-                <a16:creationId xmlns:a16="http://schemas.microsoft.com/office/drawing/2014/main" id="{B93651FE-CFFA-4E5D-9E26-928512DF944E}"/>
+                <a16:creationId xmlns:a16="http://schemas.microsoft.com/office/drawing/2014/main" id="{A9017098-C289-4FB9-8BA3-034966A428C5}"/>
               </a:ext>
             </a:extLst>
           </p:cNvPr>
@@ -12758,7 +12766,7 @@
           <p:cNvPr id="21" name="">
             <a:extLst xmlns:a="http://schemas.openxmlformats.org/drawingml/2006/main">
               <a:ext uri="{FF2B5EF4-FFF2-40B4-BE49-F238E27FC236}">
-                <a16:creationId xmlns:a16="http://schemas.microsoft.com/office/drawing/2014/main" id="{9D4D4B42-65FF-450C-9F06-2870107E5DDA}"/>
+                <a16:creationId xmlns:a16="http://schemas.microsoft.com/office/drawing/2014/main" id="{E0CDF52C-A8DB-42AD-911C-513195D4779E}"/>
               </a:ext>
             </a:extLst>
           </p:cNvPr>
@@ -12815,7 +12823,7 @@
           <p:cNvPr id="22" name="">
             <a:extLst xmlns:a="http://schemas.openxmlformats.org/drawingml/2006/main">
               <a:ext uri="{FF2B5EF4-FFF2-40B4-BE49-F238E27FC236}">
-                <a16:creationId xmlns:a16="http://schemas.microsoft.com/office/drawing/2014/main" id="{63D42FE7-8756-478B-A6CC-369476C13324}"/>
+                <a16:creationId xmlns:a16="http://schemas.microsoft.com/office/drawing/2014/main" id="{DEDAE112-0360-4C64-A871-1B2776EF8DF1}"/>
               </a:ext>
             </a:extLst>
           </p:cNvPr>
@@ -12870,7 +12878,7 @@
     </p:spTree>
     <p:extLst>
       <p:ext uri="{BB962C8B-B14F-4D97-AF65-F5344CB8AC3E}">
-        <p14:creationId xmlns:p14="http://schemas.microsoft.com/office/powerpoint/2010/main" val="2048947457"/>
+        <p14:creationId xmlns:p14="http://schemas.microsoft.com/office/powerpoint/2010/main" val="1855128085"/>
       </p:ext>
     </p:extLst>
   </p:cSld>
@@ -13071,7 +13079,7 @@
           <p:cNvPr id="22" name="">
             <a:extLst xmlns:a="http://schemas.openxmlformats.org/drawingml/2006/main">
               <a:ext uri="{FF2B5EF4-FFF2-40B4-BE49-F238E27FC236}">
-                <a16:creationId xmlns:a16="http://schemas.microsoft.com/office/drawing/2014/main" id="{B6B80F0E-33E8-4341-AECF-4A279CA2326F}"/>
+                <a16:creationId xmlns:a16="http://schemas.microsoft.com/office/drawing/2014/main" id="{C42B598A-23DB-45F9-B452-C48FF10F0744}"/>
               </a:ext>
             </a:extLst>
           </p:cNvPr>
@@ -13103,7 +13111,7 @@
           <p:cNvPr id="2" name="">
             <a:extLst xmlns:a="http://schemas.openxmlformats.org/drawingml/2006/main">
               <a:ext uri="{FF2B5EF4-FFF2-40B4-BE49-F238E27FC236}">
-                <a16:creationId xmlns:a16="http://schemas.microsoft.com/office/drawing/2014/main" id="{E733DD9E-A737-48D6-BDA9-BFD671014C9C}"/>
+                <a16:creationId xmlns:a16="http://schemas.microsoft.com/office/drawing/2014/main" id="{5D1B028F-23EA-482D-ACDB-6416F385ABA2}"/>
               </a:ext>
             </a:extLst>
           </p:cNvPr>
@@ -13160,7 +13168,7 @@
           <p:cNvPr id="3" name="">
             <a:extLst xmlns:a="http://schemas.openxmlformats.org/drawingml/2006/main">
               <a:ext uri="{FF2B5EF4-FFF2-40B4-BE49-F238E27FC236}">
-                <a16:creationId xmlns:a16="http://schemas.microsoft.com/office/drawing/2014/main" id="{D129FB97-E407-4993-A61F-0FDAC0591070}"/>
+                <a16:creationId xmlns:a16="http://schemas.microsoft.com/office/drawing/2014/main" id="{1D1414E6-188A-4B92-98DD-6C3A532C593E}"/>
               </a:ext>
             </a:extLst>
           </p:cNvPr>
@@ -13192,7 +13200,7 @@
           <p:cNvPr id="4" name="">
             <a:extLst xmlns:a="http://schemas.openxmlformats.org/drawingml/2006/main">
               <a:ext uri="{FF2B5EF4-FFF2-40B4-BE49-F238E27FC236}">
-                <a16:creationId xmlns:a16="http://schemas.microsoft.com/office/drawing/2014/main" id="{36E3ED78-11E0-4146-AA53-F12135533F2F}"/>
+                <a16:creationId xmlns:a16="http://schemas.microsoft.com/office/drawing/2014/main" id="{A5DFC6E8-F346-4F7F-824A-B47945A9E3D1}"/>
               </a:ext>
             </a:extLst>
           </p:cNvPr>
@@ -13249,7 +13257,7 @@
           <p:cNvPr id="5" name="">
             <a:extLst xmlns:a="http://schemas.openxmlformats.org/drawingml/2006/main">
               <a:ext uri="{FF2B5EF4-FFF2-40B4-BE49-F238E27FC236}">
-                <a16:creationId xmlns:a16="http://schemas.microsoft.com/office/drawing/2014/main" id="{D9CF260F-B5C4-446F-8FAD-DD3DD8A197FC}"/>
+                <a16:creationId xmlns:a16="http://schemas.microsoft.com/office/drawing/2014/main" id="{428D78AC-66A8-4063-862F-E880DABAF4C9}"/>
               </a:ext>
             </a:extLst>
           </p:cNvPr>
@@ -13306,7 +13314,7 @@
           <p:cNvPr id="6" name="">
             <a:extLst xmlns:a="http://schemas.openxmlformats.org/drawingml/2006/main">
               <a:ext uri="{FF2B5EF4-FFF2-40B4-BE49-F238E27FC236}">
-                <a16:creationId xmlns:a16="http://schemas.microsoft.com/office/drawing/2014/main" id="{66BFD7B3-A4D6-45E2-A3A2-D9F4DF26D4C1}"/>
+                <a16:creationId xmlns:a16="http://schemas.microsoft.com/office/drawing/2014/main" id="{4950AF09-61E7-437C-8A8C-81BBB93081B9}"/>
               </a:ext>
             </a:extLst>
           </p:cNvPr>
@@ -13363,7 +13371,7 @@
           <p:cNvPr id="7" name="">
             <a:extLst xmlns:a="http://schemas.openxmlformats.org/drawingml/2006/main">
               <a:ext uri="{FF2B5EF4-FFF2-40B4-BE49-F238E27FC236}">
-                <a16:creationId xmlns:a16="http://schemas.microsoft.com/office/drawing/2014/main" id="{E8CB0836-0117-452E-93CF-7EE633C4E068}"/>
+                <a16:creationId xmlns:a16="http://schemas.microsoft.com/office/drawing/2014/main" id="{17D0E66A-177B-4F71-9E80-47D711BA5159}"/>
               </a:ext>
             </a:extLst>
           </p:cNvPr>
@@ -13395,7 +13403,7 @@
           <p:cNvPr id="8" name="">
             <a:extLst xmlns:a="http://schemas.openxmlformats.org/drawingml/2006/main">
               <a:ext uri="{FF2B5EF4-FFF2-40B4-BE49-F238E27FC236}">
-                <a16:creationId xmlns:a16="http://schemas.microsoft.com/office/drawing/2014/main" id="{56F9E168-9530-43F6-890C-18A1F5DF0608}"/>
+                <a16:creationId xmlns:a16="http://schemas.microsoft.com/office/drawing/2014/main" id="{8D86C2F6-A1B0-468C-9CE9-2F8604662FF1}"/>
               </a:ext>
             </a:extLst>
           </p:cNvPr>
@@ -13452,7 +13460,7 @@
           <p:cNvPr id="9" name="">
             <a:extLst xmlns:a="http://schemas.openxmlformats.org/drawingml/2006/main">
               <a:ext uri="{FF2B5EF4-FFF2-40B4-BE49-F238E27FC236}">
-                <a16:creationId xmlns:a16="http://schemas.microsoft.com/office/drawing/2014/main" id="{75F1884D-48C3-452F-AB47-85EF16358C70}"/>
+                <a16:creationId xmlns:a16="http://schemas.microsoft.com/office/drawing/2014/main" id="{4C749E4E-325D-47C2-AD78-72A2948CDF25}"/>
               </a:ext>
             </a:extLst>
           </p:cNvPr>
@@ -13509,7 +13517,7 @@
           <p:cNvPr id="10" name="">
             <a:extLst xmlns:a="http://schemas.openxmlformats.org/drawingml/2006/main">
               <a:ext uri="{FF2B5EF4-FFF2-40B4-BE49-F238E27FC236}">
-                <a16:creationId xmlns:a16="http://schemas.microsoft.com/office/drawing/2014/main" id="{0E894ADE-7CE0-44E3-B085-09443960484A}"/>
+                <a16:creationId xmlns:a16="http://schemas.microsoft.com/office/drawing/2014/main" id="{44B02099-2533-498F-8E55-9F19141BF0DA}"/>
               </a:ext>
             </a:extLst>
           </p:cNvPr>
@@ -13543,7 +13551,7 @@
           <p:cNvPr id="11" name="">
             <a:extLst xmlns:a="http://schemas.openxmlformats.org/drawingml/2006/main">
               <a:ext uri="{FF2B5EF4-FFF2-40B4-BE49-F238E27FC236}">
-                <a16:creationId xmlns:a16="http://schemas.microsoft.com/office/drawing/2014/main" id="{5700BFEB-E8C9-437A-BCDD-B540C4CA4F33}"/>
+                <a16:creationId xmlns:a16="http://schemas.microsoft.com/office/drawing/2014/main" id="{DE235A16-424F-4976-93F1-57FBEB46862B}"/>
               </a:ext>
             </a:extLst>
           </p:cNvPr>
@@ -13575,7 +13583,7 @@
           <p:cNvPr id="12" name="">
             <a:extLst xmlns:a="http://schemas.openxmlformats.org/drawingml/2006/main">
               <a:ext uri="{FF2B5EF4-FFF2-40B4-BE49-F238E27FC236}">
-                <a16:creationId xmlns:a16="http://schemas.microsoft.com/office/drawing/2014/main" id="{8C4191DE-0B27-4530-AED4-E6B039F81234}"/>
+                <a16:creationId xmlns:a16="http://schemas.microsoft.com/office/drawing/2014/main" id="{50C02A27-B6ED-4AD8-BF89-4BA2AE1BAFAB}"/>
               </a:ext>
             </a:extLst>
           </p:cNvPr>
@@ -13632,7 +13640,7 @@
           <p:cNvPr id="13" name="">
             <a:extLst xmlns:a="http://schemas.openxmlformats.org/drawingml/2006/main">
               <a:ext uri="{FF2B5EF4-FFF2-40B4-BE49-F238E27FC236}">
-                <a16:creationId xmlns:a16="http://schemas.microsoft.com/office/drawing/2014/main" id="{759CC6D0-3AE9-4D58-B277-AC5D0DDF48B5}"/>
+                <a16:creationId xmlns:a16="http://schemas.microsoft.com/office/drawing/2014/main" id="{0850D4F9-FBEE-4080-9FD3-7F149F7CA7A1}"/>
               </a:ext>
             </a:extLst>
           </p:cNvPr>
@@ -13689,7 +13697,7 @@
           <p:cNvPr id="14" name="">
             <a:extLst xmlns:a="http://schemas.openxmlformats.org/drawingml/2006/main">
               <a:ext uri="{FF2B5EF4-FFF2-40B4-BE49-F238E27FC236}">
-                <a16:creationId xmlns:a16="http://schemas.microsoft.com/office/drawing/2014/main" id="{25D2FA9D-F8DD-47FD-8CE4-D190FA05E5BA}"/>
+                <a16:creationId xmlns:a16="http://schemas.microsoft.com/office/drawing/2014/main" id="{4C8ED0C0-ABB2-4FC1-9618-BDE69110E6C8}"/>
               </a:ext>
             </a:extLst>
           </p:cNvPr>
@@ -13723,7 +13731,7 @@
           <p:cNvPr id="15" name="">
             <a:extLst xmlns:a="http://schemas.openxmlformats.org/drawingml/2006/main">
               <a:ext uri="{FF2B5EF4-FFF2-40B4-BE49-F238E27FC236}">
-                <a16:creationId xmlns:a16="http://schemas.microsoft.com/office/drawing/2014/main" id="{51BF6A25-A79F-473B-92E9-AE4AB546A9A4}"/>
+                <a16:creationId xmlns:a16="http://schemas.microsoft.com/office/drawing/2014/main" id="{8F02DD28-57AF-4B04-A9F6-E6D3A37E29B3}"/>
               </a:ext>
             </a:extLst>
           </p:cNvPr>
@@ -13755,7 +13763,7 @@
           <p:cNvPr id="16" name="">
             <a:extLst xmlns:a="http://schemas.openxmlformats.org/drawingml/2006/main">
               <a:ext uri="{FF2B5EF4-FFF2-40B4-BE49-F238E27FC236}">
-                <a16:creationId xmlns:a16="http://schemas.microsoft.com/office/drawing/2014/main" id="{B6886FE6-3437-4BCF-A37A-35D543E9FF63}"/>
+                <a16:creationId xmlns:a16="http://schemas.microsoft.com/office/drawing/2014/main" id="{70BE9D5D-14D0-4FAA-9D34-4F001C005F6F}"/>
               </a:ext>
             </a:extLst>
           </p:cNvPr>
@@ -13812,7 +13820,7 @@
           <p:cNvPr id="17" name="">
             <a:extLst xmlns:a="http://schemas.openxmlformats.org/drawingml/2006/main">
               <a:ext uri="{FF2B5EF4-FFF2-40B4-BE49-F238E27FC236}">
-                <a16:creationId xmlns:a16="http://schemas.microsoft.com/office/drawing/2014/main" id="{9D1ED235-AAC8-41CD-82CC-BED3CADBF6B0}"/>
+                <a16:creationId xmlns:a16="http://schemas.microsoft.com/office/drawing/2014/main" id="{0B17FC40-ECEB-4730-9F55-87B6416BE826}"/>
               </a:ext>
             </a:extLst>
           </p:cNvPr>
@@ -13869,7 +13877,7 @@
           <p:cNvPr id="18" name="">
             <a:extLst xmlns:a="http://schemas.openxmlformats.org/drawingml/2006/main">
               <a:ext uri="{FF2B5EF4-FFF2-40B4-BE49-F238E27FC236}">
-                <a16:creationId xmlns:a16="http://schemas.microsoft.com/office/drawing/2014/main" id="{916ADA55-F535-4E3A-8C54-FB2DF0B93F5F}"/>
+                <a16:creationId xmlns:a16="http://schemas.microsoft.com/office/drawing/2014/main" id="{894C5FD6-5581-4C8C-AECA-312D865A158E}"/>
               </a:ext>
             </a:extLst>
           </p:cNvPr>
@@ -13903,7 +13911,7 @@
           <p:cNvPr id="19" name="">
             <a:extLst xmlns:a="http://schemas.openxmlformats.org/drawingml/2006/main">
               <a:ext uri="{FF2B5EF4-FFF2-40B4-BE49-F238E27FC236}">
-                <a16:creationId xmlns:a16="http://schemas.microsoft.com/office/drawing/2014/main" id="{2A276910-4407-41F1-B201-8E9FB6AEE959}"/>
+                <a16:creationId xmlns:a16="http://schemas.microsoft.com/office/drawing/2014/main" id="{3CBC7186-7CEE-4553-9650-AC20E84A7BD4}"/>
               </a:ext>
             </a:extLst>
           </p:cNvPr>
@@ -13935,7 +13943,7 @@
           <p:cNvPr id="20" name="">
             <a:extLst xmlns:a="http://schemas.openxmlformats.org/drawingml/2006/main">
               <a:ext uri="{FF2B5EF4-FFF2-40B4-BE49-F238E27FC236}">
-                <a16:creationId xmlns:a16="http://schemas.microsoft.com/office/drawing/2014/main" id="{CBAA0F72-2AD5-4EE7-B480-2B8E11BF8FD9}"/>
+                <a16:creationId xmlns:a16="http://schemas.microsoft.com/office/drawing/2014/main" id="{E1108733-5316-4059-88DC-8318B11E4DD9}"/>
               </a:ext>
             </a:extLst>
           </p:cNvPr>
@@ -13992,7 +14000,7 @@
           <p:cNvPr id="21" name="">
             <a:extLst xmlns:a="http://schemas.openxmlformats.org/drawingml/2006/main">
               <a:ext uri="{FF2B5EF4-FFF2-40B4-BE49-F238E27FC236}">
-                <a16:creationId xmlns:a16="http://schemas.microsoft.com/office/drawing/2014/main" id="{E9D210D2-793F-43AF-B341-D420DA8F4CA0}"/>
+                <a16:creationId xmlns:a16="http://schemas.microsoft.com/office/drawing/2014/main" id="{93F34C9E-F1FC-467B-968B-2721A2A03531}"/>
               </a:ext>
             </a:extLst>
           </p:cNvPr>
@@ -14047,7 +14055,7 @@
     </p:spTree>
     <p:extLst>
       <p:ext uri="{BB962C8B-B14F-4D97-AF65-F5344CB8AC3E}">
-        <p14:creationId xmlns:p14="http://schemas.microsoft.com/office/powerpoint/2010/main" val="440018468"/>
+        <p14:creationId xmlns:p14="http://schemas.microsoft.com/office/powerpoint/2010/main" val="653079847"/>
       </p:ext>
     </p:extLst>
   </p:cSld>
